--- a/exports/pptx/lessons/primary-module-06-moon-phases-tithi/day-02-two-halves.pptx
+++ b/exports/pptx/lessons/primary-module-06-moon-phases-tithi/day-02-two-halves.pptx
@@ -16,9 +16,11 @@
     <p:sldId id="264" r:id="rId10"/>
     <p:sldId id="265" r:id="rId11"/>
     <p:sldId id="266" r:id="rId12"/>
+    <p:sldId id="267" r:id="rId13"/>
+    <p:sldId id="268" r:id="rId14"/>
   </p:sldIdLst>
   <p:notesMasterIdLst>
-    <p:notesMasterId r:id="rId13"/>
+    <p:notesMasterId r:id="rId15"/>
   </p:notesMasterIdLst>
   <p:sldSz cx="9144000" cy="5143500"/>
   <p:notesSz cx="5143500" cy="9144000"/>
@@ -712,6 +714,182 @@
             <a:fld id="{F7021451-1387-4CA6-816F-3879F97B5CBC}" type="slidenum">
               <a:rPr lang="en-US"/>
               <a:t>11</a:t>
+            </a:fld>
+            <a:endParaRPr lang="en-US"/>
+          </a:p>
+        </p:txBody>
+      </p:sp>
+    </p:spTree>
+    <p:extLst>
+      <p:ext uri="{BB962C8B-B14F-4D97-AF65-F5344CB8AC3E}">
+        <p14:creationId xmlns:p14="http://schemas.microsoft.com/office/powerpoint/2010/main" val="1024086991"/>
+      </p:ext>
+    </p:extLst>
+  </p:cSld>
+  <p:clrMapOvr>
+    <a:masterClrMapping/>
+  </p:clrMapOvr>
+</p:notes>
+</file>
+
+<file path=ppt/notesSlides/notesSlide12.xml><?xml version="1.0" encoding="utf-8"?>
+<p:notes xmlns:a="http://schemas.openxmlformats.org/drawingml/2006/main" xmlns:r="http://schemas.openxmlformats.org/officeDocument/2006/relationships" xmlns:p="http://schemas.openxmlformats.org/presentationml/2006/main">
+  <p:cSld>
+    <p:spTree>
+      <p:nvGrpSpPr>
+        <p:cNvPr id="1" name=""/>
+        <p:cNvGrpSpPr/>
+        <p:nvPr/>
+      </p:nvGrpSpPr>
+      <p:grpSpPr>
+        <a:xfrm>
+          <a:off x="0" y="0"/>
+          <a:ext cx="0" cy="0"/>
+          <a:chOff x="0" y="0"/>
+          <a:chExt cx="0" cy="0"/>
+        </a:xfrm>
+      </p:grpSpPr>
+      <p:sp>
+        <p:nvSpPr>
+          <p:cNvPr id="2" name="Slide Image Placeholder 1"/>
+          <p:cNvSpPr>
+            <a:spLocks noGrp="1" noRot="1" noChangeAspect="1"/>
+          </p:cNvSpPr>
+          <p:nvPr>
+            <p:ph type="sldImg"/>
+          </p:nvPr>
+        </p:nvSpPr>
+        <p:spPr/>
+      </p:sp>
+      <p:sp>
+        <p:nvSpPr>
+          <p:cNvPr id="3" name="Notes Placeholder 2"/>
+          <p:cNvSpPr>
+            <a:spLocks noGrp="1"/>
+          </p:cNvSpPr>
+          <p:nvPr>
+            <p:ph type="body" idx="1"/>
+          </p:nvPr>
+        </p:nvSpPr>
+        <p:spPr/>
+        <p:txBody>
+          <a:bodyPr/>
+          <a:lstStyle/>
+          <a:p>
+            <a:r>
+              <a:rPr lang="en-US" dirty="0"/>
+              <a:t/>
+            </a:r>
+            <a:endParaRPr lang="en-US" dirty="0"/>
+          </a:p>
+        </p:txBody>
+      </p:sp>
+      <p:sp>
+        <p:nvSpPr>
+          <p:cNvPr id="4" name="Slide Number Placeholder 3"/>
+          <p:cNvSpPr>
+            <a:spLocks noGrp="1"/>
+          </p:cNvSpPr>
+          <p:nvPr>
+            <p:ph type="sldNum" sz="quarter" idx="10"/>
+          </p:nvPr>
+        </p:nvSpPr>
+        <p:spPr/>
+        <p:txBody>
+          <a:bodyPr/>
+          <a:lstStyle/>
+          <a:p>
+            <a:fld id="{F7021451-1387-4CA6-816F-3879F97B5CBC}" type="slidenum">
+              <a:rPr lang="en-US"/>
+              <a:t>12</a:t>
+            </a:fld>
+            <a:endParaRPr lang="en-US"/>
+          </a:p>
+        </p:txBody>
+      </p:sp>
+    </p:spTree>
+    <p:extLst>
+      <p:ext uri="{BB962C8B-B14F-4D97-AF65-F5344CB8AC3E}">
+        <p14:creationId xmlns:p14="http://schemas.microsoft.com/office/powerpoint/2010/main" val="1024086991"/>
+      </p:ext>
+    </p:extLst>
+  </p:cSld>
+  <p:clrMapOvr>
+    <a:masterClrMapping/>
+  </p:clrMapOvr>
+</p:notes>
+</file>
+
+<file path=ppt/notesSlides/notesSlide13.xml><?xml version="1.0" encoding="utf-8"?>
+<p:notes xmlns:a="http://schemas.openxmlformats.org/drawingml/2006/main" xmlns:r="http://schemas.openxmlformats.org/officeDocument/2006/relationships" xmlns:p="http://schemas.openxmlformats.org/presentationml/2006/main">
+  <p:cSld>
+    <p:spTree>
+      <p:nvGrpSpPr>
+        <p:cNvPr id="1" name=""/>
+        <p:cNvGrpSpPr/>
+        <p:nvPr/>
+      </p:nvGrpSpPr>
+      <p:grpSpPr>
+        <a:xfrm>
+          <a:off x="0" y="0"/>
+          <a:ext cx="0" cy="0"/>
+          <a:chOff x="0" y="0"/>
+          <a:chExt cx="0" cy="0"/>
+        </a:xfrm>
+      </p:grpSpPr>
+      <p:sp>
+        <p:nvSpPr>
+          <p:cNvPr id="2" name="Slide Image Placeholder 1"/>
+          <p:cNvSpPr>
+            <a:spLocks noGrp="1" noRot="1" noChangeAspect="1"/>
+          </p:cNvSpPr>
+          <p:nvPr>
+            <p:ph type="sldImg"/>
+          </p:nvPr>
+        </p:nvSpPr>
+        <p:spPr/>
+      </p:sp>
+      <p:sp>
+        <p:nvSpPr>
+          <p:cNvPr id="3" name="Notes Placeholder 2"/>
+          <p:cNvSpPr>
+            <a:spLocks noGrp="1"/>
+          </p:cNvSpPr>
+          <p:nvPr>
+            <p:ph type="body" idx="1"/>
+          </p:nvPr>
+        </p:nvSpPr>
+        <p:spPr/>
+        <p:txBody>
+          <a:bodyPr/>
+          <a:lstStyle/>
+          <a:p>
+            <a:r>
+              <a:rPr lang="en-US" dirty="0"/>
+              <a:t/>
+            </a:r>
+            <a:endParaRPr lang="en-US" dirty="0"/>
+          </a:p>
+        </p:txBody>
+      </p:sp>
+      <p:sp>
+        <p:nvSpPr>
+          <p:cNvPr id="4" name="Slide Number Placeholder 3"/>
+          <p:cNvSpPr>
+            <a:spLocks noGrp="1"/>
+          </p:cNvSpPr>
+          <p:nvPr>
+            <p:ph type="sldNum" sz="quarter" idx="10"/>
+          </p:nvPr>
+        </p:nvSpPr>
+        <p:spPr/>
+        <p:txBody>
+          <a:bodyPr/>
+          <a:lstStyle/>
+          <a:p>
+            <a:fld id="{F7021451-1387-4CA6-816F-3879F97B5CBC}" type="slidenum">
+              <a:rPr lang="en-US"/>
+              <a:t>13</a:t>
             </a:fld>
             <a:endParaRPr lang="en-US"/>
           </a:p>
@@ -1965,194 +2143,6 @@
         </p:nvSpPr>
         <p:spPr>
           <a:xfrm>
-            <a:off x="406301" y="1223963"/>
-            <a:ext cx="8498026" cy="274290"/>
-          </a:xfrm>
-          <a:prstGeom prst="rect">
-            <a:avLst/>
-          </a:prstGeom>
-          <a:noFill/>
-          <a:ln/>
-        </p:spPr>
-        <p:txBody>
-          <a:bodyPr wrap="square" lIns="0" tIns="0" rIns="0" bIns="0" rtlCol="0" anchor="t"/>
-          <a:lstStyle/>
-          <a:p>
-            <a:pPr algn="l" indent="0" marL="0">
-              <a:lnSpc>
-                <a:spcPts val="2160"/>
-              </a:lnSpc>
-              <a:spcBef>
-                <a:spcPts val="600"/>
-              </a:spcBef>
-              <a:spcAft>
-                <a:spcPts val="800"/>
-              </a:spcAft>
-              <a:buNone/>
-            </a:pPr>
-            <a:r>
-              <a:rPr lang="en-US" sz="1800" b="1" dirty="0">
-                <a:solidFill>
-                  <a:srgbClr val="E07A5F"/>
-                </a:solidFill>
-                <a:latin typeface="Georgia" pitchFamily="34" charset="0"/>
-                <a:ea typeface="Georgia" pitchFamily="34" charset="-122"/>
-                <a:cs typeface="Georgia" pitchFamily="34" charset="-120"/>
-              </a:rPr>
-              <a:t>Goal</a:t>
-            </a:r>
-            <a:endParaRPr lang="en-US" sz="1800" dirty="0"/>
-          </a:p>
-        </p:txBody>
-      </p:sp>
-      <p:sp>
-        <p:nvSpPr>
-          <p:cNvPr id="6" name="Text 4"/>
-          <p:cNvSpPr/>
-          <p:nvPr/>
-        </p:nvSpPr>
-        <p:spPr>
-          <a:xfrm>
-            <a:off x="406301" y="1637854"/>
-            <a:ext cx="8498026" cy="426541"/>
-          </a:xfrm>
-          <a:prstGeom prst="rect">
-            <a:avLst/>
-          </a:prstGeom>
-          <a:noFill/>
-          <a:ln/>
-        </p:spPr>
-        <p:txBody>
-          <a:bodyPr wrap="square" lIns="0" tIns="0" rIns="0" bIns="0" rtlCol="0" anchor="t"/>
-          <a:lstStyle/>
-          <a:p>
-            <a:pPr algn="l" indent="0" marL="0">
-              <a:lnSpc>
-                <a:spcPts val="1680"/>
-              </a:lnSpc>
-              <a:spcBef>
-                <a:spcPts val="300"/>
-              </a:spcBef>
-              <a:spcAft>
-                <a:spcPts val="300"/>
-              </a:spcAft>
-              <a:buNone/>
-            </a:pPr>
-            <a:r>
-              <a:rPr lang="en-US" sz="1200" dirty="0">
-                <a:solidFill>
-                  <a:srgbClr val="2C2C2C"/>
-                </a:solidFill>
-                <a:latin typeface="Verdana" pitchFamily="34" charset="0"/>
-                <a:ea typeface="Verdana" pitchFamily="34" charset="-122"/>
-                <a:cs typeface="Verdana" pitchFamily="34" charset="-120"/>
-              </a:rPr>
-              <a:t>Children learn that the month has two halves — one where the Moon grows, one where it shrinks — and that </a:t>
-            </a:r>
-            <a:pPr algn="l" indent="0" marL="0">
-              <a:lnSpc>
-                <a:spcPts val="1680"/>
-              </a:lnSpc>
-              <a:spcBef>
-                <a:spcPts val="300"/>
-              </a:spcBef>
-              <a:spcAft>
-                <a:spcPts val="300"/>
-              </a:spcAft>
-              <a:buNone/>
-            </a:pPr>
-            <a:r>
-              <a:rPr lang="en-US" sz="1200" i="1" dirty="0">
-                <a:solidFill>
-                  <a:srgbClr val="2C2C2C"/>
-                </a:solidFill>
-                <a:latin typeface="Verdana" pitchFamily="34" charset="0"/>
-                <a:ea typeface="Verdana" pitchFamily="34" charset="-122"/>
-                <a:cs typeface="Verdana" pitchFamily="34" charset="-120"/>
-              </a:rPr>
-              <a:t>amāvasyā</a:t>
-            </a:r>
-            <a:pPr algn="l" indent="0" marL="0">
-              <a:lnSpc>
-                <a:spcPts val="1680"/>
-              </a:lnSpc>
-              <a:spcBef>
-                <a:spcPts val="300"/>
-              </a:spcBef>
-              <a:spcAft>
-                <a:spcPts val="300"/>
-              </a:spcAft>
-              <a:buNone/>
-            </a:pPr>
-            <a:r>
-              <a:rPr lang="en-US" sz="1200" dirty="0">
-                <a:solidFill>
-                  <a:srgbClr val="2C2C2C"/>
-                </a:solidFill>
-                <a:latin typeface="Verdana" pitchFamily="34" charset="0"/>
-                <a:ea typeface="Verdana" pitchFamily="34" charset="-122"/>
-                <a:cs typeface="Verdana" pitchFamily="34" charset="-120"/>
-              </a:rPr>
-              <a:t> and </a:t>
-            </a:r>
-            <a:pPr algn="l" indent="0" marL="0">
-              <a:lnSpc>
-                <a:spcPts val="1680"/>
-              </a:lnSpc>
-              <a:spcBef>
-                <a:spcPts val="300"/>
-              </a:spcBef>
-              <a:spcAft>
-                <a:spcPts val="300"/>
-              </a:spcAft>
-              <a:buNone/>
-            </a:pPr>
-            <a:r>
-              <a:rPr lang="en-US" sz="1200" i="1" dirty="0">
-                <a:solidFill>
-                  <a:srgbClr val="2C2C2C"/>
-                </a:solidFill>
-                <a:latin typeface="Verdana" pitchFamily="34" charset="0"/>
-                <a:ea typeface="Verdana" pitchFamily="34" charset="-122"/>
-                <a:cs typeface="Verdana" pitchFamily="34" charset="-120"/>
-              </a:rPr>
-              <a:t>pūrṇimā</a:t>
-            </a:r>
-            <a:pPr algn="l" indent="0" marL="0">
-              <a:lnSpc>
-                <a:spcPts val="1680"/>
-              </a:lnSpc>
-              <a:spcBef>
-                <a:spcPts val="300"/>
-              </a:spcBef>
-              <a:spcAft>
-                <a:spcPts val="300"/>
-              </a:spcAft>
-              <a:buNone/>
-            </a:pPr>
-            <a:r>
-              <a:rPr lang="en-US" sz="1200" dirty="0">
-                <a:solidFill>
-                  <a:srgbClr val="2C2C2C"/>
-                </a:solidFill>
-                <a:latin typeface="Verdana" pitchFamily="34" charset="0"/>
-                <a:ea typeface="Verdana" pitchFamily="34" charset="-122"/>
-                <a:cs typeface="Verdana" pitchFamily="34" charset="-120"/>
-              </a:rPr>
-              <a:t> are the special anchor nights.</a:t>
-            </a:r>
-            <a:endParaRPr lang="en-US" sz="1200" dirty="0"/>
-          </a:p>
-        </p:txBody>
-      </p:sp>
-      <p:sp>
-        <p:nvSpPr>
-          <p:cNvPr id="7" name="Text 5"/>
-          <p:cNvSpPr/>
-          <p:nvPr/>
-        </p:nvSpPr>
-        <p:spPr>
-          <a:xfrm>
             <a:off x="406301" y="4434929"/>
             <a:ext cx="8498026" cy="213271"/>
           </a:xfrm>
@@ -2297,7 +2287,7 @@
                 <a:ea typeface="Georgia" pitchFamily="34" charset="-122"/>
                 <a:cs typeface="Georgia" pitchFamily="34" charset="-120"/>
               </a:rPr>
-              <a:t>Differentiation</a:t>
+              <a:t>Wrap-up (3 min)</a:t>
             </a:r>
             <a:endParaRPr lang="en-US" sz="1800" dirty="0"/>
           </a:p>
@@ -2312,7 +2302,7 @@
         <p:spPr>
           <a:xfrm>
             <a:off x="634901" y="883593"/>
-            <a:ext cx="8102798" cy="525661"/>
+            <a:ext cx="8102798" cy="975122"/>
           </a:xfrm>
           <a:prstGeom prst="rect">
             <a:avLst/>
@@ -2335,26 +2325,6 @@
               <a:buChar char="•"/>
             </a:pPr>
             <a:r>
-              <a:rPr lang="en-US" sz="1200" b="1" dirty="0">
-                <a:solidFill>
-                  <a:srgbClr val="2C2C2C"/>
-                </a:solidFill>
-                <a:latin typeface="Verdana" pitchFamily="34" charset="0"/>
-                <a:ea typeface="Verdana" pitchFamily="34" charset="-122"/>
-                <a:cs typeface="Verdana" pitchFamily="34" charset="-120"/>
-              </a:rPr>
-              <a:t>Tier up:</a:t>
-            </a:r>
-            <a:pPr algn="l" indent="0" marL="0">
-              <a:lnSpc>
-                <a:spcPts val="1620"/>
-              </a:lnSpc>
-              <a:spcAft>
-                <a:spcPts val="300"/>
-              </a:spcAft>
-              <a:buNone/>
-            </a:pPr>
-            <a:r>
               <a:rPr lang="en-US" sz="1200" dirty="0">
                 <a:solidFill>
                   <a:srgbClr val="2C2C2C"/>
@@ -2363,87 +2333,7 @@
                 <a:ea typeface="Verdana" pitchFamily="34" charset="-122"/>
                 <a:cs typeface="Verdana" pitchFamily="34" charset="-120"/>
               </a:rPr>
-              <a:t> Draw all the Moon shapes on the line — not just </a:t>
-            </a:r>
-            <a:pPr algn="l" indent="0" marL="0">
-              <a:lnSpc>
-                <a:spcPts val="1620"/>
-              </a:lnSpc>
-              <a:spcAft>
-                <a:spcPts val="300"/>
-              </a:spcAft>
-              <a:buNone/>
-            </a:pPr>
-            <a:r>
-              <a:rPr lang="en-US" sz="1200" i="1" dirty="0">
-                <a:solidFill>
-                  <a:srgbClr val="2C2C2C"/>
-                </a:solidFill>
-                <a:latin typeface="Verdana" pitchFamily="34" charset="0"/>
-                <a:ea typeface="Verdana" pitchFamily="34" charset="-122"/>
-                <a:cs typeface="Verdana" pitchFamily="34" charset="-120"/>
-              </a:rPr>
-              <a:t>pūrṇimā</a:t>
-            </a:r>
-            <a:pPr algn="l" indent="0" marL="0">
-              <a:lnSpc>
-                <a:spcPts val="1620"/>
-              </a:lnSpc>
-              <a:spcAft>
-                <a:spcPts val="300"/>
-              </a:spcAft>
-              <a:buNone/>
-            </a:pPr>
-            <a:r>
-              <a:rPr lang="en-US" sz="1200" dirty="0">
-                <a:solidFill>
-                  <a:srgbClr val="2C2C2C"/>
-                </a:solidFill>
-                <a:latin typeface="Verdana" pitchFamily="34" charset="0"/>
-                <a:ea typeface="Verdana" pitchFamily="34" charset="-122"/>
-                <a:cs typeface="Verdana" pitchFamily="34" charset="-120"/>
-              </a:rPr>
-              <a:t> and </a:t>
-            </a:r>
-            <a:pPr algn="l" indent="0" marL="0">
-              <a:lnSpc>
-                <a:spcPts val="1620"/>
-              </a:lnSpc>
-              <a:spcAft>
-                <a:spcPts val="300"/>
-              </a:spcAft>
-              <a:buNone/>
-            </a:pPr>
-            <a:r>
-              <a:rPr lang="en-US" sz="1200" i="1" dirty="0">
-                <a:solidFill>
-                  <a:srgbClr val="2C2C2C"/>
-                </a:solidFill>
-                <a:latin typeface="Verdana" pitchFamily="34" charset="0"/>
-                <a:ea typeface="Verdana" pitchFamily="34" charset="-122"/>
-                <a:cs typeface="Verdana" pitchFamily="34" charset="-120"/>
-              </a:rPr>
-              <a:t>amāvasyā</a:t>
-            </a:r>
-            <a:pPr algn="l" indent="0" marL="0">
-              <a:lnSpc>
-                <a:spcPts val="1620"/>
-              </a:lnSpc>
-              <a:spcAft>
-                <a:spcPts val="300"/>
-              </a:spcAft>
-              <a:buNone/>
-            </a:pPr>
-            <a:r>
-              <a:rPr lang="en-US" sz="1200" dirty="0">
-                <a:solidFill>
-                  <a:srgbClr val="2C2C2C"/>
-                </a:solidFill>
-                <a:latin typeface="Verdana" pitchFamily="34" charset="0"/>
-                <a:ea typeface="Verdana" pitchFamily="34" charset="-122"/>
-                <a:cs typeface="Verdana" pitchFamily="34" charset="-120"/>
-              </a:rPr>
-              <a:t>.</a:t>
+              <a:t>Hold up 2–3 drawings.</a:t>
             </a:r>
             <a:endParaRPr lang="en-US" sz="1200" dirty="0"/>
           </a:p>
@@ -2459,6 +2349,50 @@
               <a:buChar char="•"/>
             </a:pPr>
             <a:r>
+              <a:rPr lang="en-US" sz="1200" dirty="0">
+                <a:solidFill>
+                  <a:srgbClr val="2C2C2C"/>
+                </a:solidFill>
+                <a:latin typeface="Verdana" pitchFamily="34" charset="0"/>
+                <a:ea typeface="Verdana" pitchFamily="34" charset="-122"/>
+                <a:cs typeface="Verdana" pitchFamily="34" charset="-120"/>
+              </a:rPr>
+              <a:t>Chant once more: </a:t>
+            </a:r>
+            <a:pPr algn="l" indent="0" marL="0">
+              <a:lnSpc>
+                <a:spcPts val="1620"/>
+              </a:lnSpc>
+              <a:spcAft>
+                <a:spcPts val="300"/>
+              </a:spcAft>
+              <a:buNone/>
+            </a:pPr>
+            <a:r>
+              <a:rPr lang="en-US" sz="1200" i="1" dirty="0">
+                <a:solidFill>
+                  <a:srgbClr val="2C2C2C"/>
+                </a:solidFill>
+                <a:latin typeface="Verdana" pitchFamily="34" charset="0"/>
+                <a:ea typeface="Verdana" pitchFamily="34" charset="-122"/>
+                <a:cs typeface="Verdana" pitchFamily="34" charset="-120"/>
+              </a:rPr>
+              <a:t>"am - mah - vahs - yah! poor - ni - mah!"</a:t>
+            </a:r>
+            <a:endParaRPr lang="en-US" sz="1200" dirty="0"/>
+          </a:p>
+          <a:p>
+            <a:pPr algn="l" marL="342900" indent="-342900">
+              <a:lnSpc>
+                <a:spcPts val="1620"/>
+              </a:lnSpc>
+              <a:spcAft>
+                <a:spcPts val="300"/>
+              </a:spcAft>
+              <a:buSzPct val="100000"/>
+              <a:buChar char="•"/>
+            </a:pPr>
+            <a:r>
               <a:rPr lang="en-US" sz="1200" b="1" dirty="0">
                 <a:solidFill>
                   <a:srgbClr val="2C2C2C"/>
@@ -2467,7 +2401,7 @@
                 <a:ea typeface="Verdana" pitchFamily="34" charset="-122"/>
                 <a:cs typeface="Verdana" pitchFamily="34" charset="-120"/>
               </a:rPr>
-              <a:t>Tier down:</a:t>
+              <a:t>Homework:</a:t>
             </a:r>
             <a:pPr algn="l" indent="0" marL="0">
               <a:lnSpc>
@@ -2487,7 +2421,7 @@
                 <a:ea typeface="Verdana" pitchFamily="34" charset="-122"/>
                 <a:cs typeface="Verdana" pitchFamily="34" charset="-120"/>
               </a:rPr>
-              <a:t> Just draw </a:t>
+              <a:t> </a:t>
             </a:r>
             <a:pPr algn="l" indent="0" marL="0">
               <a:lnSpc>
@@ -2507,67 +2441,7 @@
                 <a:ea typeface="Verdana" pitchFamily="34" charset="-122"/>
                 <a:cs typeface="Verdana" pitchFamily="34" charset="-120"/>
               </a:rPr>
-              <a:t>pūrṇimā</a:t>
-            </a:r>
-            <a:pPr algn="l" indent="0" marL="0">
-              <a:lnSpc>
-                <a:spcPts val="1620"/>
-              </a:lnSpc>
-              <a:spcAft>
-                <a:spcPts val="300"/>
-              </a:spcAft>
-              <a:buNone/>
-            </a:pPr>
-            <a:r>
-              <a:rPr lang="en-US" sz="1200" dirty="0">
-                <a:solidFill>
-                  <a:srgbClr val="2C2C2C"/>
-                </a:solidFill>
-                <a:latin typeface="Verdana" pitchFamily="34" charset="0"/>
-                <a:ea typeface="Verdana" pitchFamily="34" charset="-122"/>
-                <a:cs typeface="Verdana" pitchFamily="34" charset="-120"/>
-              </a:rPr>
-              <a:t> today. </a:t>
-            </a:r>
-            <a:pPr algn="l" indent="0" marL="0">
-              <a:lnSpc>
-                <a:spcPts val="1620"/>
-              </a:lnSpc>
-              <a:spcAft>
-                <a:spcPts val="300"/>
-              </a:spcAft>
-              <a:buNone/>
-            </a:pPr>
-            <a:r>
-              <a:rPr lang="en-US" sz="1200" i="1" dirty="0">
-                <a:solidFill>
-                  <a:srgbClr val="2C2C2C"/>
-                </a:solidFill>
-                <a:latin typeface="Verdana" pitchFamily="34" charset="0"/>
-                <a:ea typeface="Verdana" pitchFamily="34" charset="-122"/>
-                <a:cs typeface="Verdana" pitchFamily="34" charset="-120"/>
-              </a:rPr>
-              <a:t>Amāvasyā</a:t>
-            </a:r>
-            <a:pPr algn="l" indent="0" marL="0">
-              <a:lnSpc>
-                <a:spcPts val="1620"/>
-              </a:lnSpc>
-              <a:spcAft>
-                <a:spcPts val="300"/>
-              </a:spcAft>
-              <a:buNone/>
-            </a:pPr>
-            <a:r>
-              <a:rPr lang="en-US" sz="1200" dirty="0">
-                <a:solidFill>
-                  <a:srgbClr val="2C2C2C"/>
-                </a:solidFill>
-                <a:latin typeface="Verdana" pitchFamily="34" charset="0"/>
-                <a:ea typeface="Verdana" pitchFamily="34" charset="-122"/>
-                <a:cs typeface="Verdana" pitchFamily="34" charset="-120"/>
-              </a:rPr>
-              <a:t> tomorrow.</a:t>
+              <a:t>Look at the Moon tonight. Is the Moon growing or shrinking? (Ask a grown-up if you don't know.)</a:t>
             </a:r>
             <a:endParaRPr lang="en-US" sz="1200" dirty="0"/>
           </a:p>
@@ -2725,7 +2599,7 @@
                 <a:ea typeface="Georgia" pitchFamily="34" charset="-122"/>
                 <a:cs typeface="Georgia" pitchFamily="34" charset="-120"/>
               </a:rPr>
-              <a:t>Teacher's quick notes</a:t>
+              <a:t>Homework</a:t>
             </a:r>
             <a:endParaRPr lang="en-US" sz="1800" dirty="0"/>
           </a:p>
@@ -2739,8 +2613,8 @@
         </p:nvSpPr>
         <p:spPr>
           <a:xfrm>
-            <a:off x="406301" y="870942"/>
-            <a:ext cx="8498026" cy="1066354"/>
+            <a:off x="634901" y="883593"/>
+            <a:ext cx="8102798" cy="281880"/>
           </a:xfrm>
           <a:prstGeom prst="rect">
             <a:avLst/>
@@ -2752,6 +2626,132 @@
           <a:bodyPr wrap="square" lIns="0" tIns="0" rIns="0" bIns="0" rtlCol="0" anchor="t"/>
           <a:lstStyle/>
           <a:p>
+            <a:pPr algn="l" marL="342900" indent="-342900">
+              <a:lnSpc>
+                <a:spcPts val="1620"/>
+              </a:lnSpc>
+              <a:spcAft>
+                <a:spcPts val="300"/>
+              </a:spcAft>
+              <a:buSzPct val="100000"/>
+              <a:buChar char="•"/>
+            </a:pPr>
+            <a:r>
+              <a:rPr lang="en-US" sz="1200" dirty="0">
+                <a:solidFill>
+                  <a:srgbClr val="2C2C2C"/>
+                </a:solidFill>
+                <a:latin typeface="Verdana" pitchFamily="34" charset="0"/>
+                <a:ea typeface="Verdana" pitchFamily="34" charset="-122"/>
+                <a:cs typeface="Verdana" pitchFamily="34" charset="-120"/>
+              </a:rPr>
+              <a:t>Continue the Moon Diary. Add </a:t>
+            </a:r>
+            <a:pPr algn="l" indent="0" marL="0">
+              <a:lnSpc>
+                <a:spcPts val="1620"/>
+              </a:lnSpc>
+              <a:spcAft>
+                <a:spcPts val="300"/>
+              </a:spcAft>
+              <a:buNone/>
+            </a:pPr>
+            <a:r>
+              <a:rPr lang="en-US" sz="1200" b="1" dirty="0">
+                <a:solidFill>
+                  <a:srgbClr val="2C2C2C"/>
+                </a:solidFill>
+                <a:latin typeface="Verdana" pitchFamily="34" charset="0"/>
+                <a:ea typeface="Verdana" pitchFamily="34" charset="-122"/>
+                <a:cs typeface="Verdana" pitchFamily="34" charset="-120"/>
+              </a:rPr>
+              <a:t>"growing"</a:t>
+            </a:r>
+            <a:pPr algn="l" indent="0" marL="0">
+              <a:lnSpc>
+                <a:spcPts val="1620"/>
+              </a:lnSpc>
+              <a:spcAft>
+                <a:spcPts val="300"/>
+              </a:spcAft>
+              <a:buNone/>
+            </a:pPr>
+            <a:r>
+              <a:rPr lang="en-US" sz="1200" dirty="0">
+                <a:solidFill>
+                  <a:srgbClr val="2C2C2C"/>
+                </a:solidFill>
+                <a:latin typeface="Verdana" pitchFamily="34" charset="0"/>
+                <a:ea typeface="Verdana" pitchFamily="34" charset="-122"/>
+                <a:cs typeface="Verdana" pitchFamily="34" charset="-120"/>
+              </a:rPr>
+              <a:t> or </a:t>
+            </a:r>
+            <a:pPr algn="l" indent="0" marL="0">
+              <a:lnSpc>
+                <a:spcPts val="1620"/>
+              </a:lnSpc>
+              <a:spcAft>
+                <a:spcPts val="300"/>
+              </a:spcAft>
+              <a:buNone/>
+            </a:pPr>
+            <a:r>
+              <a:rPr lang="en-US" sz="1200" b="1" dirty="0">
+                <a:solidFill>
+                  <a:srgbClr val="2C2C2C"/>
+                </a:solidFill>
+                <a:latin typeface="Verdana" pitchFamily="34" charset="0"/>
+                <a:ea typeface="Verdana" pitchFamily="34" charset="-122"/>
+                <a:cs typeface="Verdana" pitchFamily="34" charset="-120"/>
+              </a:rPr>
+              <a:t>"shrinking"</a:t>
+            </a:r>
+            <a:pPr algn="l" indent="0" marL="0">
+              <a:lnSpc>
+                <a:spcPts val="1620"/>
+              </a:lnSpc>
+              <a:spcAft>
+                <a:spcPts val="300"/>
+              </a:spcAft>
+              <a:buNone/>
+            </a:pPr>
+            <a:r>
+              <a:rPr lang="en-US" sz="1200" dirty="0">
+                <a:solidFill>
+                  <a:srgbClr val="2C2C2C"/>
+                </a:solidFill>
+                <a:latin typeface="Verdana" pitchFamily="34" charset="0"/>
+                <a:ea typeface="Verdana" pitchFamily="34" charset="-122"/>
+                <a:cs typeface="Verdana" pitchFamily="34" charset="-120"/>
+              </a:rPr>
+              <a:t> next to tonight's sketch.</a:t>
+            </a:r>
+            <a:endParaRPr lang="en-US" sz="1200" dirty="0"/>
+          </a:p>
+        </p:txBody>
+      </p:sp>
+      <p:sp>
+        <p:nvSpPr>
+          <p:cNvPr id="5" name="Text 3"/>
+          <p:cNvSpPr/>
+          <p:nvPr/>
+        </p:nvSpPr>
+        <p:spPr>
+          <a:xfrm>
+            <a:off x="406301" y="4434929"/>
+            <a:ext cx="8498026" cy="213271"/>
+          </a:xfrm>
+          <a:prstGeom prst="rect">
+            <a:avLst/>
+          </a:prstGeom>
+          <a:noFill/>
+          <a:ln/>
+        </p:spPr>
+        <p:txBody>
+          <a:bodyPr wrap="square" lIns="0" tIns="0" rIns="0" bIns="0" rtlCol="0" anchor="t"/>
+          <a:lstStyle/>
+          <a:p>
             <a:pPr algn="l" indent="0" marL="0">
               <a:lnSpc>
                 <a:spcPts val="1680"/>
@@ -2773,8 +2773,413 @@
                 <a:ea typeface="Verdana" pitchFamily="34" charset="-122"/>
                 <a:cs typeface="Verdana" pitchFamily="34" charset="-120"/>
               </a:rPr>
-              <a:t>– Some children will say "the Moon is hiding" on amāvasyā. That's a lovely phrasing — agree, then add: "and the Sun's bright light is making it hard for us to see anyway." – Watch for the misconception "the Earth's shadow makes the new moon." It doesn't (that's eclipses). Today we don't unpack that — just say "no, it's because we can't see the bright side." – The words "growing" and "shrinking" are easier than </a:t>
-            </a:r>
+              <a:t>Primary ·  · IKS Curriculum</a:t>
+            </a:r>
+            <a:endParaRPr lang="en-US" sz="1200" dirty="0"/>
+          </a:p>
+        </p:txBody>
+      </p:sp>
+    </p:spTree>
+  </p:cSld>
+  <p:clrMapOvr>
+    <a:masterClrMapping/>
+  </p:clrMapOvr>
+</p:sld>
+</file>
+
+<file path=ppt/slides/slide12.xml><?xml version="1.0" encoding="utf-8"?>
+<p:sld xmlns:a="http://schemas.openxmlformats.org/drawingml/2006/main" xmlns:r="http://schemas.openxmlformats.org/officeDocument/2006/relationships" xmlns:p="http://schemas.openxmlformats.org/presentationml/2006/main">
+  <p:cSld name="Slide 12">
+    <p:bg>
+      <p:bgPr>
+        <a:solidFill>
+          <a:srgbClr val="FAF7F2"/>
+        </a:solidFill>
+      </p:bgPr>
+    </p:bg>
+    <p:spTree>
+      <p:nvGrpSpPr>
+        <p:cNvPr id="1" name=""/>
+        <p:cNvGrpSpPr/>
+        <p:nvPr/>
+      </p:nvGrpSpPr>
+      <p:grpSpPr>
+        <a:xfrm>
+          <a:off x="0" y="0"/>
+          <a:ext cx="0" cy="0"/>
+          <a:chOff x="0" y="0"/>
+          <a:chExt cx="0" cy="0"/>
+        </a:xfrm>
+      </p:grpSpPr>
+      <p:sp>
+        <p:nvSpPr>
+          <p:cNvPr id="2" name="Text 0"/>
+          <p:cNvSpPr/>
+          <p:nvPr/>
+        </p:nvSpPr>
+        <p:spPr>
+          <a:xfrm>
+            <a:off x="0" y="0"/>
+            <a:ext cx="9144000" cy="101501"/>
+          </a:xfrm>
+          <a:prstGeom prst="rect">
+            <a:avLst/>
+          </a:prstGeom>
+          <a:solidFill>
+            <a:srgbClr val="87A96B"/>
+          </a:solidFill>
+          <a:ln/>
+        </p:spPr>
+        <p:txBody>
+          <a:bodyPr wrap="square" rtlCol="0" anchor="ctr"/>
+          <a:lstStyle/>
+          <a:p>
+            <a:pPr indent="0" marL="0">
+              <a:buNone/>
+            </a:pPr>
+            <a:endParaRPr lang="en-US" dirty="0"/>
+          </a:p>
+        </p:txBody>
+      </p:sp>
+      <p:sp>
+        <p:nvSpPr>
+          <p:cNvPr id="3" name="Text 1"/>
+          <p:cNvSpPr/>
+          <p:nvPr/>
+        </p:nvSpPr>
+        <p:spPr>
+          <a:xfrm>
+            <a:off x="406301" y="457051"/>
+            <a:ext cx="8498026" cy="274290"/>
+          </a:xfrm>
+          <a:prstGeom prst="rect">
+            <a:avLst/>
+          </a:prstGeom>
+          <a:noFill/>
+          <a:ln/>
+        </p:spPr>
+        <p:txBody>
+          <a:bodyPr wrap="square" lIns="0" tIns="0" rIns="0" bIns="0" rtlCol="0" anchor="t"/>
+          <a:lstStyle/>
+          <a:p>
+            <a:pPr algn="l" indent="0" marL="0">
+              <a:lnSpc>
+                <a:spcPts val="2160"/>
+              </a:lnSpc>
+              <a:spcBef>
+                <a:spcPts val="600"/>
+              </a:spcBef>
+              <a:spcAft>
+                <a:spcPts val="800"/>
+              </a:spcAft>
+              <a:buNone/>
+            </a:pPr>
+            <a:r>
+              <a:rPr lang="en-US" sz="1800" b="1" dirty="0">
+                <a:solidFill>
+                  <a:srgbClr val="E07A5F"/>
+                </a:solidFill>
+                <a:latin typeface="Georgia" pitchFamily="34" charset="0"/>
+                <a:ea typeface="Georgia" pitchFamily="34" charset="-122"/>
+                <a:cs typeface="Georgia" pitchFamily="34" charset="-120"/>
+              </a:rPr>
+              <a:t>Differentiation</a:t>
+            </a:r>
+            <a:endParaRPr lang="en-US" sz="1800" dirty="0"/>
+          </a:p>
+        </p:txBody>
+      </p:sp>
+      <p:sp>
+        <p:nvSpPr>
+          <p:cNvPr id="4" name="Text 2"/>
+          <p:cNvSpPr/>
+          <p:nvPr/>
+        </p:nvSpPr>
+        <p:spPr>
+          <a:xfrm>
+            <a:off x="634901" y="883593"/>
+            <a:ext cx="8102798" cy="525661"/>
+          </a:xfrm>
+          <a:prstGeom prst="rect">
+            <a:avLst/>
+          </a:prstGeom>
+          <a:noFill/>
+          <a:ln/>
+        </p:spPr>
+        <p:txBody>
+          <a:bodyPr wrap="square" lIns="0" tIns="0" rIns="0" bIns="0" rtlCol="0" anchor="t"/>
+          <a:lstStyle/>
+          <a:p>
+            <a:pPr algn="l" marL="342900" indent="-342900">
+              <a:lnSpc>
+                <a:spcPts val="1620"/>
+              </a:lnSpc>
+              <a:spcAft>
+                <a:spcPts val="300"/>
+              </a:spcAft>
+              <a:buSzPct val="100000"/>
+              <a:buChar char="•"/>
+            </a:pPr>
+            <a:r>
+              <a:rPr lang="en-US" sz="1200" b="1" dirty="0">
+                <a:solidFill>
+                  <a:srgbClr val="2C2C2C"/>
+                </a:solidFill>
+                <a:latin typeface="Verdana" pitchFamily="34" charset="0"/>
+                <a:ea typeface="Verdana" pitchFamily="34" charset="-122"/>
+                <a:cs typeface="Verdana" pitchFamily="34" charset="-120"/>
+              </a:rPr>
+              <a:t>Tier up:</a:t>
+            </a:r>
+            <a:pPr algn="l" indent="0" marL="0">
+              <a:lnSpc>
+                <a:spcPts val="1620"/>
+              </a:lnSpc>
+              <a:spcAft>
+                <a:spcPts val="300"/>
+              </a:spcAft>
+              <a:buNone/>
+            </a:pPr>
+            <a:r>
+              <a:rPr lang="en-US" sz="1200" dirty="0">
+                <a:solidFill>
+                  <a:srgbClr val="2C2C2C"/>
+                </a:solidFill>
+                <a:latin typeface="Verdana" pitchFamily="34" charset="0"/>
+                <a:ea typeface="Verdana" pitchFamily="34" charset="-122"/>
+                <a:cs typeface="Verdana" pitchFamily="34" charset="-120"/>
+              </a:rPr>
+              <a:t> Draw all the Moon shapes on the line — not just </a:t>
+            </a:r>
+            <a:pPr algn="l" indent="0" marL="0">
+              <a:lnSpc>
+                <a:spcPts val="1620"/>
+              </a:lnSpc>
+              <a:spcAft>
+                <a:spcPts val="300"/>
+              </a:spcAft>
+              <a:buNone/>
+            </a:pPr>
+            <a:r>
+              <a:rPr lang="en-US" sz="1200" i="1" dirty="0">
+                <a:solidFill>
+                  <a:srgbClr val="2C2C2C"/>
+                </a:solidFill>
+                <a:latin typeface="Verdana" pitchFamily="34" charset="0"/>
+                <a:ea typeface="Verdana" pitchFamily="34" charset="-122"/>
+                <a:cs typeface="Verdana" pitchFamily="34" charset="-120"/>
+              </a:rPr>
+              <a:t>pūrṇimā</a:t>
+            </a:r>
+            <a:pPr algn="l" indent="0" marL="0">
+              <a:lnSpc>
+                <a:spcPts val="1620"/>
+              </a:lnSpc>
+              <a:spcAft>
+                <a:spcPts val="300"/>
+              </a:spcAft>
+              <a:buNone/>
+            </a:pPr>
+            <a:r>
+              <a:rPr lang="en-US" sz="1200" dirty="0">
+                <a:solidFill>
+                  <a:srgbClr val="2C2C2C"/>
+                </a:solidFill>
+                <a:latin typeface="Verdana" pitchFamily="34" charset="0"/>
+                <a:ea typeface="Verdana" pitchFamily="34" charset="-122"/>
+                <a:cs typeface="Verdana" pitchFamily="34" charset="-120"/>
+              </a:rPr>
+              <a:t> and </a:t>
+            </a:r>
+            <a:pPr algn="l" indent="0" marL="0">
+              <a:lnSpc>
+                <a:spcPts val="1620"/>
+              </a:lnSpc>
+              <a:spcAft>
+                <a:spcPts val="300"/>
+              </a:spcAft>
+              <a:buNone/>
+            </a:pPr>
+            <a:r>
+              <a:rPr lang="en-US" sz="1200" i="1" dirty="0">
+                <a:solidFill>
+                  <a:srgbClr val="2C2C2C"/>
+                </a:solidFill>
+                <a:latin typeface="Verdana" pitchFamily="34" charset="0"/>
+                <a:ea typeface="Verdana" pitchFamily="34" charset="-122"/>
+                <a:cs typeface="Verdana" pitchFamily="34" charset="-120"/>
+              </a:rPr>
+              <a:t>amāvasyā</a:t>
+            </a:r>
+            <a:pPr algn="l" indent="0" marL="0">
+              <a:lnSpc>
+                <a:spcPts val="1620"/>
+              </a:lnSpc>
+              <a:spcAft>
+                <a:spcPts val="300"/>
+              </a:spcAft>
+              <a:buNone/>
+            </a:pPr>
+            <a:r>
+              <a:rPr lang="en-US" sz="1200" dirty="0">
+                <a:solidFill>
+                  <a:srgbClr val="2C2C2C"/>
+                </a:solidFill>
+                <a:latin typeface="Verdana" pitchFamily="34" charset="0"/>
+                <a:ea typeface="Verdana" pitchFamily="34" charset="-122"/>
+                <a:cs typeface="Verdana" pitchFamily="34" charset="-120"/>
+              </a:rPr>
+              <a:t>.</a:t>
+            </a:r>
+            <a:endParaRPr lang="en-US" sz="1200" dirty="0"/>
+          </a:p>
+          <a:p>
+            <a:pPr algn="l" marL="342900" indent="-342900">
+              <a:lnSpc>
+                <a:spcPts val="1620"/>
+              </a:lnSpc>
+              <a:spcAft>
+                <a:spcPts val="300"/>
+              </a:spcAft>
+              <a:buSzPct val="100000"/>
+              <a:buChar char="•"/>
+            </a:pPr>
+            <a:r>
+              <a:rPr lang="en-US" sz="1200" b="1" dirty="0">
+                <a:solidFill>
+                  <a:srgbClr val="2C2C2C"/>
+                </a:solidFill>
+                <a:latin typeface="Verdana" pitchFamily="34" charset="0"/>
+                <a:ea typeface="Verdana" pitchFamily="34" charset="-122"/>
+                <a:cs typeface="Verdana" pitchFamily="34" charset="-120"/>
+              </a:rPr>
+              <a:t>Tier down:</a:t>
+            </a:r>
+            <a:pPr algn="l" indent="0" marL="0">
+              <a:lnSpc>
+                <a:spcPts val="1620"/>
+              </a:lnSpc>
+              <a:spcAft>
+                <a:spcPts val="300"/>
+              </a:spcAft>
+              <a:buNone/>
+            </a:pPr>
+            <a:r>
+              <a:rPr lang="en-US" sz="1200" dirty="0">
+                <a:solidFill>
+                  <a:srgbClr val="2C2C2C"/>
+                </a:solidFill>
+                <a:latin typeface="Verdana" pitchFamily="34" charset="0"/>
+                <a:ea typeface="Verdana" pitchFamily="34" charset="-122"/>
+                <a:cs typeface="Verdana" pitchFamily="34" charset="-120"/>
+              </a:rPr>
+              <a:t> Just draw </a:t>
+            </a:r>
+            <a:pPr algn="l" indent="0" marL="0">
+              <a:lnSpc>
+                <a:spcPts val="1620"/>
+              </a:lnSpc>
+              <a:spcAft>
+                <a:spcPts val="300"/>
+              </a:spcAft>
+              <a:buNone/>
+            </a:pPr>
+            <a:r>
+              <a:rPr lang="en-US" sz="1200" i="1" dirty="0">
+                <a:solidFill>
+                  <a:srgbClr val="2C2C2C"/>
+                </a:solidFill>
+                <a:latin typeface="Verdana" pitchFamily="34" charset="0"/>
+                <a:ea typeface="Verdana" pitchFamily="34" charset="-122"/>
+                <a:cs typeface="Verdana" pitchFamily="34" charset="-120"/>
+              </a:rPr>
+              <a:t>pūrṇimā</a:t>
+            </a:r>
+            <a:pPr algn="l" indent="0" marL="0">
+              <a:lnSpc>
+                <a:spcPts val="1620"/>
+              </a:lnSpc>
+              <a:spcAft>
+                <a:spcPts val="300"/>
+              </a:spcAft>
+              <a:buNone/>
+            </a:pPr>
+            <a:r>
+              <a:rPr lang="en-US" sz="1200" dirty="0">
+                <a:solidFill>
+                  <a:srgbClr val="2C2C2C"/>
+                </a:solidFill>
+                <a:latin typeface="Verdana" pitchFamily="34" charset="0"/>
+                <a:ea typeface="Verdana" pitchFamily="34" charset="-122"/>
+                <a:cs typeface="Verdana" pitchFamily="34" charset="-120"/>
+              </a:rPr>
+              <a:t> today. </a:t>
+            </a:r>
+            <a:pPr algn="l" indent="0" marL="0">
+              <a:lnSpc>
+                <a:spcPts val="1620"/>
+              </a:lnSpc>
+              <a:spcAft>
+                <a:spcPts val="300"/>
+              </a:spcAft>
+              <a:buNone/>
+            </a:pPr>
+            <a:r>
+              <a:rPr lang="en-US" sz="1200" i="1" dirty="0">
+                <a:solidFill>
+                  <a:srgbClr val="2C2C2C"/>
+                </a:solidFill>
+                <a:latin typeface="Verdana" pitchFamily="34" charset="0"/>
+                <a:ea typeface="Verdana" pitchFamily="34" charset="-122"/>
+                <a:cs typeface="Verdana" pitchFamily="34" charset="-120"/>
+              </a:rPr>
+              <a:t>Amāvasyā</a:t>
+            </a:r>
+            <a:pPr algn="l" indent="0" marL="0">
+              <a:lnSpc>
+                <a:spcPts val="1620"/>
+              </a:lnSpc>
+              <a:spcAft>
+                <a:spcPts val="300"/>
+              </a:spcAft>
+              <a:buNone/>
+            </a:pPr>
+            <a:r>
+              <a:rPr lang="en-US" sz="1200" dirty="0">
+                <a:solidFill>
+                  <a:srgbClr val="2C2C2C"/>
+                </a:solidFill>
+                <a:latin typeface="Verdana" pitchFamily="34" charset="0"/>
+                <a:ea typeface="Verdana" pitchFamily="34" charset="-122"/>
+                <a:cs typeface="Verdana" pitchFamily="34" charset="-120"/>
+              </a:rPr>
+              <a:t> tomorrow.</a:t>
+            </a:r>
+            <a:endParaRPr lang="en-US" sz="1200" dirty="0"/>
+          </a:p>
+        </p:txBody>
+      </p:sp>
+      <p:sp>
+        <p:nvSpPr>
+          <p:cNvPr id="5" name="Text 3"/>
+          <p:cNvSpPr/>
+          <p:nvPr/>
+        </p:nvSpPr>
+        <p:spPr>
+          <a:xfrm>
+            <a:off x="406301" y="4434929"/>
+            <a:ext cx="8498026" cy="213271"/>
+          </a:xfrm>
+          <a:prstGeom prst="rect">
+            <a:avLst/>
+          </a:prstGeom>
+          <a:noFill/>
+          <a:ln/>
+        </p:spPr>
+        <p:txBody>
+          <a:bodyPr wrap="square" lIns="0" tIns="0" rIns="0" bIns="0" rtlCol="0" anchor="t"/>
+          <a:lstStyle/>
+          <a:p>
             <a:pPr algn="l" indent="0" marL="0">
               <a:lnSpc>
                 <a:spcPts val="1680"/>
@@ -2788,6 +3193,230 @@
               <a:buNone/>
             </a:pPr>
             <a:r>
+              <a:rPr lang="en-US" sz="1200" dirty="0">
+                <a:solidFill>
+                  <a:srgbClr val="2C2C2C"/>
+                </a:solidFill>
+                <a:latin typeface="Verdana" pitchFamily="34" charset="0"/>
+                <a:ea typeface="Verdana" pitchFamily="34" charset="-122"/>
+                <a:cs typeface="Verdana" pitchFamily="34" charset="-120"/>
+              </a:rPr>
+              <a:t>Primary ·  · IKS Curriculum</a:t>
+            </a:r>
+            <a:endParaRPr lang="en-US" sz="1200" dirty="0"/>
+          </a:p>
+        </p:txBody>
+      </p:sp>
+    </p:spTree>
+  </p:cSld>
+  <p:clrMapOvr>
+    <a:masterClrMapping/>
+  </p:clrMapOvr>
+</p:sld>
+</file>
+
+<file path=ppt/slides/slide13.xml><?xml version="1.0" encoding="utf-8"?>
+<p:sld xmlns:a="http://schemas.openxmlformats.org/drawingml/2006/main" xmlns:r="http://schemas.openxmlformats.org/officeDocument/2006/relationships" xmlns:p="http://schemas.openxmlformats.org/presentationml/2006/main">
+  <p:cSld name="Slide 13">
+    <p:bg>
+      <p:bgPr>
+        <a:solidFill>
+          <a:srgbClr val="FAF7F2"/>
+        </a:solidFill>
+      </p:bgPr>
+    </p:bg>
+    <p:spTree>
+      <p:nvGrpSpPr>
+        <p:cNvPr id="1" name=""/>
+        <p:cNvGrpSpPr/>
+        <p:nvPr/>
+      </p:nvGrpSpPr>
+      <p:grpSpPr>
+        <a:xfrm>
+          <a:off x="0" y="0"/>
+          <a:ext cx="0" cy="0"/>
+          <a:chOff x="0" y="0"/>
+          <a:chExt cx="0" cy="0"/>
+        </a:xfrm>
+      </p:grpSpPr>
+      <p:sp>
+        <p:nvSpPr>
+          <p:cNvPr id="2" name="Text 0"/>
+          <p:cNvSpPr/>
+          <p:nvPr/>
+        </p:nvSpPr>
+        <p:spPr>
+          <a:xfrm>
+            <a:off x="0" y="0"/>
+            <a:ext cx="9144000" cy="101501"/>
+          </a:xfrm>
+          <a:prstGeom prst="rect">
+            <a:avLst/>
+          </a:prstGeom>
+          <a:solidFill>
+            <a:srgbClr val="87A96B"/>
+          </a:solidFill>
+          <a:ln/>
+        </p:spPr>
+        <p:txBody>
+          <a:bodyPr wrap="square" rtlCol="0" anchor="ctr"/>
+          <a:lstStyle/>
+          <a:p>
+            <a:pPr indent="0" marL="0">
+              <a:buNone/>
+            </a:pPr>
+            <a:endParaRPr lang="en-US" dirty="0"/>
+          </a:p>
+        </p:txBody>
+      </p:sp>
+      <p:sp>
+        <p:nvSpPr>
+          <p:cNvPr id="3" name="Text 1"/>
+          <p:cNvSpPr/>
+          <p:nvPr/>
+        </p:nvSpPr>
+        <p:spPr>
+          <a:xfrm>
+            <a:off x="406301" y="457051"/>
+            <a:ext cx="8498026" cy="274290"/>
+          </a:xfrm>
+          <a:prstGeom prst="rect">
+            <a:avLst/>
+          </a:prstGeom>
+          <a:noFill/>
+          <a:ln/>
+        </p:spPr>
+        <p:txBody>
+          <a:bodyPr wrap="square" lIns="0" tIns="0" rIns="0" bIns="0" rtlCol="0" anchor="t"/>
+          <a:lstStyle/>
+          <a:p>
+            <a:pPr algn="l" indent="0" marL="0">
+              <a:lnSpc>
+                <a:spcPts val="2160"/>
+              </a:lnSpc>
+              <a:spcBef>
+                <a:spcPts val="600"/>
+              </a:spcBef>
+              <a:spcAft>
+                <a:spcPts val="800"/>
+              </a:spcAft>
+              <a:buNone/>
+            </a:pPr>
+            <a:r>
+              <a:rPr lang="en-US" sz="1800" b="1" dirty="0">
+                <a:solidFill>
+                  <a:srgbClr val="E07A5F"/>
+                </a:solidFill>
+                <a:latin typeface="Georgia" pitchFamily="34" charset="0"/>
+                <a:ea typeface="Georgia" pitchFamily="34" charset="-122"/>
+                <a:cs typeface="Georgia" pitchFamily="34" charset="-120"/>
+              </a:rPr>
+              <a:t>Teacher's quick notes</a:t>
+            </a:r>
+            <a:endParaRPr lang="en-US" sz="1800" dirty="0"/>
+          </a:p>
+        </p:txBody>
+      </p:sp>
+      <p:sp>
+        <p:nvSpPr>
+          <p:cNvPr id="4" name="Text 2"/>
+          <p:cNvSpPr/>
+          <p:nvPr/>
+        </p:nvSpPr>
+        <p:spPr>
+          <a:xfrm>
+            <a:off x="634901" y="883593"/>
+            <a:ext cx="8102798" cy="1386483"/>
+          </a:xfrm>
+          <a:prstGeom prst="rect">
+            <a:avLst/>
+          </a:prstGeom>
+          <a:noFill/>
+          <a:ln/>
+        </p:spPr>
+        <p:txBody>
+          <a:bodyPr wrap="square" lIns="0" tIns="0" rIns="0" bIns="0" rtlCol="0" anchor="t"/>
+          <a:lstStyle/>
+          <a:p>
+            <a:pPr algn="l" marL="342900" indent="-342900">
+              <a:lnSpc>
+                <a:spcPts val="1620"/>
+              </a:lnSpc>
+              <a:spcAft>
+                <a:spcPts val="300"/>
+              </a:spcAft>
+              <a:buSzPct val="100000"/>
+              <a:buChar char="•"/>
+            </a:pPr>
+            <a:r>
+              <a:rPr lang="en-US" sz="1200" dirty="0">
+                <a:solidFill>
+                  <a:srgbClr val="2C2C2C"/>
+                </a:solidFill>
+                <a:latin typeface="Verdana" pitchFamily="34" charset="0"/>
+                <a:ea typeface="Verdana" pitchFamily="34" charset="-122"/>
+                <a:cs typeface="Verdana" pitchFamily="34" charset="-120"/>
+              </a:rPr>
+              <a:t>Some children will say "the Moon is hiding" on amāvasyā. That's a lovely phrasing — agree, then add: "and the Sun's bright light is making it hard for us to see anyway."</a:t>
+            </a:r>
+            <a:endParaRPr lang="en-US" sz="1200" dirty="0"/>
+          </a:p>
+          <a:p>
+            <a:pPr algn="l" marL="342900" indent="-342900">
+              <a:lnSpc>
+                <a:spcPts val="1620"/>
+              </a:lnSpc>
+              <a:spcAft>
+                <a:spcPts val="300"/>
+              </a:spcAft>
+              <a:buSzPct val="100000"/>
+              <a:buChar char="•"/>
+            </a:pPr>
+            <a:r>
+              <a:rPr lang="en-US" sz="1200" dirty="0">
+                <a:solidFill>
+                  <a:srgbClr val="2C2C2C"/>
+                </a:solidFill>
+                <a:latin typeface="Verdana" pitchFamily="34" charset="0"/>
+                <a:ea typeface="Verdana" pitchFamily="34" charset="-122"/>
+                <a:cs typeface="Verdana" pitchFamily="34" charset="-120"/>
+              </a:rPr>
+              <a:t>Watch for the misconception "the Earth's shadow makes the new moon." It doesn't (that's eclipses). Today we don't unpack that — just say "no, it's because we can't see the bright side."</a:t>
+            </a:r>
+            <a:endParaRPr lang="en-US" sz="1200" dirty="0"/>
+          </a:p>
+          <a:p>
+            <a:pPr algn="l" marL="342900" indent="-342900">
+              <a:lnSpc>
+                <a:spcPts val="1620"/>
+              </a:lnSpc>
+              <a:spcAft>
+                <a:spcPts val="300"/>
+              </a:spcAft>
+              <a:buSzPct val="100000"/>
+              <a:buChar char="•"/>
+            </a:pPr>
+            <a:r>
+              <a:rPr lang="en-US" sz="1200" dirty="0">
+                <a:solidFill>
+                  <a:srgbClr val="2C2C2C"/>
+                </a:solidFill>
+                <a:latin typeface="Verdana" pitchFamily="34" charset="0"/>
+                <a:ea typeface="Verdana" pitchFamily="34" charset="-122"/>
+                <a:cs typeface="Verdana" pitchFamily="34" charset="-120"/>
+              </a:rPr>
+              <a:t>The words "growing" and "shrinking" are easier than </a:t>
+            </a:r>
+            <a:pPr algn="l" indent="0" marL="0">
+              <a:lnSpc>
+                <a:spcPts val="1620"/>
+              </a:lnSpc>
+              <a:spcAft>
+                <a:spcPts val="300"/>
+              </a:spcAft>
+              <a:buNone/>
+            </a:pPr>
+            <a:r>
               <a:rPr lang="en-US" sz="1200" i="1" dirty="0">
                 <a:solidFill>
                   <a:srgbClr val="2C2C2C"/>
@@ -2800,11 +3429,8 @@
             </a:r>
             <a:pPr algn="l" indent="0" marL="0">
               <a:lnSpc>
-                <a:spcPts val="1680"/>
-              </a:lnSpc>
-              <a:spcBef>
-                <a:spcPts val="300"/>
-              </a:spcBef>
+                <a:spcPts val="1620"/>
+              </a:lnSpc>
               <a:spcAft>
                 <a:spcPts val="300"/>
               </a:spcAft>
@@ -2823,11 +3449,8 @@
             </a:r>
             <a:pPr algn="l" indent="0" marL="0">
               <a:lnSpc>
-                <a:spcPts val="1680"/>
-              </a:lnSpc>
-              <a:spcBef>
-                <a:spcPts val="300"/>
-              </a:spcBef>
+                <a:spcPts val="1620"/>
+              </a:lnSpc>
               <a:spcAft>
                 <a:spcPts val="300"/>
               </a:spcAft>
@@ -2846,11 +3469,8 @@
             </a:r>
             <a:pPr algn="l" indent="0" marL="0">
               <a:lnSpc>
-                <a:spcPts val="1680"/>
-              </a:lnSpc>
-              <a:spcBef>
-                <a:spcPts val="300"/>
-              </a:spcBef>
+                <a:spcPts val="1620"/>
+              </a:lnSpc>
               <a:spcAft>
                 <a:spcPts val="300"/>
               </a:spcAft>
@@ -3023,7 +3643,7 @@
                 <a:ea typeface="Georgia" pitchFamily="34" charset="-122"/>
                 <a:cs typeface="Georgia" pitchFamily="34" charset="-120"/>
               </a:rPr>
-              <a:t>Materials</a:t>
+              <a:t>Goal</a:t>
             </a:r>
             <a:endParaRPr lang="en-US" sz="1800" dirty="0"/>
           </a:p>
@@ -3071,7 +3691,99 @@
                 <a:ea typeface="Verdana" pitchFamily="34" charset="-122"/>
                 <a:cs typeface="Verdana" pitchFamily="34" charset="-120"/>
               </a:rPr>
-              <a:t>– The torch and ball from Day 1 – A long strip of paper or a chalk line on the floor – Drawing paper + crayons</a:t>
+              <a:t>Children learn that the month has two halves — one where the Moon grows, one where it shrinks — and that </a:t>
+            </a:r>
+            <a:pPr algn="l" indent="0" marL="0">
+              <a:lnSpc>
+                <a:spcPts val="1680"/>
+              </a:lnSpc>
+              <a:spcBef>
+                <a:spcPts val="300"/>
+              </a:spcBef>
+              <a:spcAft>
+                <a:spcPts val="300"/>
+              </a:spcAft>
+              <a:buNone/>
+            </a:pPr>
+            <a:r>
+              <a:rPr lang="en-US" sz="1200" i="1" dirty="0">
+                <a:solidFill>
+                  <a:srgbClr val="2C2C2C"/>
+                </a:solidFill>
+                <a:latin typeface="Verdana" pitchFamily="34" charset="0"/>
+                <a:ea typeface="Verdana" pitchFamily="34" charset="-122"/>
+                <a:cs typeface="Verdana" pitchFamily="34" charset="-120"/>
+              </a:rPr>
+              <a:t>amāvasyā</a:t>
+            </a:r>
+            <a:pPr algn="l" indent="0" marL="0">
+              <a:lnSpc>
+                <a:spcPts val="1680"/>
+              </a:lnSpc>
+              <a:spcBef>
+                <a:spcPts val="300"/>
+              </a:spcBef>
+              <a:spcAft>
+                <a:spcPts val="300"/>
+              </a:spcAft>
+              <a:buNone/>
+            </a:pPr>
+            <a:r>
+              <a:rPr lang="en-US" sz="1200" dirty="0">
+                <a:solidFill>
+                  <a:srgbClr val="2C2C2C"/>
+                </a:solidFill>
+                <a:latin typeface="Verdana" pitchFamily="34" charset="0"/>
+                <a:ea typeface="Verdana" pitchFamily="34" charset="-122"/>
+                <a:cs typeface="Verdana" pitchFamily="34" charset="-120"/>
+              </a:rPr>
+              <a:t> and </a:t>
+            </a:r>
+            <a:pPr algn="l" indent="0" marL="0">
+              <a:lnSpc>
+                <a:spcPts val="1680"/>
+              </a:lnSpc>
+              <a:spcBef>
+                <a:spcPts val="300"/>
+              </a:spcBef>
+              <a:spcAft>
+                <a:spcPts val="300"/>
+              </a:spcAft>
+              <a:buNone/>
+            </a:pPr>
+            <a:r>
+              <a:rPr lang="en-US" sz="1200" i="1" dirty="0">
+                <a:solidFill>
+                  <a:srgbClr val="2C2C2C"/>
+                </a:solidFill>
+                <a:latin typeface="Verdana" pitchFamily="34" charset="0"/>
+                <a:ea typeface="Verdana" pitchFamily="34" charset="-122"/>
+                <a:cs typeface="Verdana" pitchFamily="34" charset="-120"/>
+              </a:rPr>
+              <a:t>pūrṇimā</a:t>
+            </a:r>
+            <a:pPr algn="l" indent="0" marL="0">
+              <a:lnSpc>
+                <a:spcPts val="1680"/>
+              </a:lnSpc>
+              <a:spcBef>
+                <a:spcPts val="300"/>
+              </a:spcBef>
+              <a:spcAft>
+                <a:spcPts val="300"/>
+              </a:spcAft>
+              <a:buNone/>
+            </a:pPr>
+            <a:r>
+              <a:rPr lang="en-US" sz="1200" dirty="0">
+                <a:solidFill>
+                  <a:srgbClr val="2C2C2C"/>
+                </a:solidFill>
+                <a:latin typeface="Verdana" pitchFamily="34" charset="0"/>
+                <a:ea typeface="Verdana" pitchFamily="34" charset="-122"/>
+                <a:cs typeface="Verdana" pitchFamily="34" charset="-120"/>
+              </a:rPr>
+              <a:t> are the special anchor nights.</a:t>
             </a:r>
             <a:endParaRPr lang="en-US" sz="1200" dirty="0"/>
           </a:p>
@@ -3229,7 +3941,7 @@
                 <a:ea typeface="Georgia" pitchFamily="34" charset="-122"/>
                 <a:cs typeface="Georgia" pitchFamily="34" charset="-120"/>
               </a:rPr>
-              <a:t>The flow</a:t>
+              <a:t>Materials</a:t>
             </a:r>
             <a:endParaRPr lang="en-US" sz="1800" dirty="0"/>
           </a:p>
@@ -3238,6 +3950,100 @@
       <p:sp>
         <p:nvSpPr>
           <p:cNvPr id="4" name="Text 2"/>
+          <p:cNvSpPr/>
+          <p:nvPr/>
+        </p:nvSpPr>
+        <p:spPr>
+          <a:xfrm>
+            <a:off x="634901" y="883593"/>
+            <a:ext cx="8102798" cy="769441"/>
+          </a:xfrm>
+          <a:prstGeom prst="rect">
+            <a:avLst/>
+          </a:prstGeom>
+          <a:noFill/>
+          <a:ln/>
+        </p:spPr>
+        <p:txBody>
+          <a:bodyPr wrap="square" lIns="0" tIns="0" rIns="0" bIns="0" rtlCol="0" anchor="t"/>
+          <a:lstStyle/>
+          <a:p>
+            <a:pPr algn="l" marL="342900" indent="-342900">
+              <a:lnSpc>
+                <a:spcPts val="1620"/>
+              </a:lnSpc>
+              <a:spcAft>
+                <a:spcPts val="300"/>
+              </a:spcAft>
+              <a:buSzPct val="100000"/>
+              <a:buChar char="•"/>
+            </a:pPr>
+            <a:r>
+              <a:rPr lang="en-US" sz="1200" dirty="0">
+                <a:solidFill>
+                  <a:srgbClr val="2C2C2C"/>
+                </a:solidFill>
+                <a:latin typeface="Verdana" pitchFamily="34" charset="0"/>
+                <a:ea typeface="Verdana" pitchFamily="34" charset="-122"/>
+                <a:cs typeface="Verdana" pitchFamily="34" charset="-120"/>
+              </a:rPr>
+              <a:t>The torch and ball from Day 1</a:t>
+            </a:r>
+            <a:endParaRPr lang="en-US" sz="1200" dirty="0"/>
+          </a:p>
+          <a:p>
+            <a:pPr algn="l" marL="342900" indent="-342900">
+              <a:lnSpc>
+                <a:spcPts val="1620"/>
+              </a:lnSpc>
+              <a:spcAft>
+                <a:spcPts val="300"/>
+              </a:spcAft>
+              <a:buSzPct val="100000"/>
+              <a:buChar char="•"/>
+            </a:pPr>
+            <a:r>
+              <a:rPr lang="en-US" sz="1200" dirty="0">
+                <a:solidFill>
+                  <a:srgbClr val="2C2C2C"/>
+                </a:solidFill>
+                <a:latin typeface="Verdana" pitchFamily="34" charset="0"/>
+                <a:ea typeface="Verdana" pitchFamily="34" charset="-122"/>
+                <a:cs typeface="Verdana" pitchFamily="34" charset="-120"/>
+              </a:rPr>
+              <a:t>A long strip of paper or a chalk line on the floor</a:t>
+            </a:r>
+            <a:endParaRPr lang="en-US" sz="1200" dirty="0"/>
+          </a:p>
+          <a:p>
+            <a:pPr algn="l" marL="342900" indent="-342900">
+              <a:lnSpc>
+                <a:spcPts val="1620"/>
+              </a:lnSpc>
+              <a:spcAft>
+                <a:spcPts val="300"/>
+              </a:spcAft>
+              <a:buSzPct val="100000"/>
+              <a:buChar char="•"/>
+            </a:pPr>
+            <a:r>
+              <a:rPr lang="en-US" sz="1200" dirty="0">
+                <a:solidFill>
+                  <a:srgbClr val="2C2C2C"/>
+                </a:solidFill>
+                <a:latin typeface="Verdana" pitchFamily="34" charset="0"/>
+                <a:ea typeface="Verdana" pitchFamily="34" charset="-122"/>
+                <a:cs typeface="Verdana" pitchFamily="34" charset="-120"/>
+              </a:rPr>
+              <a:t>Drawing paper + crayons</a:t>
+            </a:r>
+            <a:endParaRPr lang="en-US" sz="1200" dirty="0"/>
+          </a:p>
+        </p:txBody>
+      </p:sp>
+      <p:sp>
+        <p:nvSpPr>
+          <p:cNvPr id="5" name="Text 3"/>
           <p:cNvSpPr/>
           <p:nvPr/>
         </p:nvSpPr>
@@ -3387,7 +4193,7 @@
                 <a:ea typeface="Georgia" pitchFamily="34" charset="-122"/>
                 <a:cs typeface="Georgia" pitchFamily="34" charset="-120"/>
               </a:rPr>
-              <a:t>Settle + recall (4 min)</a:t>
+              <a:t>The flow</a:t>
             </a:r>
             <a:endParaRPr lang="en-US" sz="1800" dirty="0"/>
           </a:p>
@@ -3396,217 +4202,6 @@
       <p:sp>
         <p:nvSpPr>
           <p:cNvPr id="4" name="Text 2"/>
-          <p:cNvSpPr/>
-          <p:nvPr/>
-        </p:nvSpPr>
-        <p:spPr>
-          <a:xfrm>
-            <a:off x="406301" y="870942"/>
-            <a:ext cx="8498026" cy="426541"/>
-          </a:xfrm>
-          <a:prstGeom prst="rect">
-            <a:avLst/>
-          </a:prstGeom>
-          <a:noFill/>
-          <a:ln/>
-        </p:spPr>
-        <p:txBody>
-          <a:bodyPr wrap="square" lIns="0" tIns="0" rIns="0" bIns="0" rtlCol="0" anchor="t"/>
-          <a:lstStyle/>
-          <a:p>
-            <a:pPr algn="l" indent="0" marL="0">
-              <a:lnSpc>
-                <a:spcPts val="1680"/>
-              </a:lnSpc>
-              <a:spcBef>
-                <a:spcPts val="300"/>
-              </a:spcBef>
-              <a:spcAft>
-                <a:spcPts val="300"/>
-              </a:spcAft>
-              <a:buNone/>
-            </a:pPr>
-            <a:r>
-              <a:rPr lang="en-US" sz="1200" dirty="0">
-                <a:solidFill>
-                  <a:srgbClr val="2C2C2C"/>
-                </a:solidFill>
-                <a:latin typeface="Verdana" pitchFamily="34" charset="0"/>
-                <a:ea typeface="Verdana" pitchFamily="34" charset="-122"/>
-                <a:cs typeface="Verdana" pitchFamily="34" charset="-120"/>
-              </a:rPr>
-              <a:t>Sit on the mat. Teacher: </a:t>
-            </a:r>
-            <a:pPr algn="l" indent="0" marL="0">
-              <a:lnSpc>
-                <a:spcPts val="1680"/>
-              </a:lnSpc>
-              <a:spcBef>
-                <a:spcPts val="300"/>
-              </a:spcBef>
-              <a:spcAft>
-                <a:spcPts val="300"/>
-              </a:spcAft>
-              <a:buNone/>
-            </a:pPr>
-            <a:r>
-              <a:rPr lang="en-US" sz="1200" i="1" dirty="0">
-                <a:solidFill>
-                  <a:srgbClr val="2C2C2C"/>
-                </a:solidFill>
-                <a:latin typeface="Verdana" pitchFamily="34" charset="0"/>
-                <a:ea typeface="Verdana" pitchFamily="34" charset="-122"/>
-                <a:cs typeface="Verdana" pitchFamily="34" charset="-120"/>
-              </a:rPr>
-              <a:t>"Did anyone see the Moon last night?"</a:t>
-            </a:r>
-            <a:pPr algn="l" indent="0" marL="0">
-              <a:lnSpc>
-                <a:spcPts val="1680"/>
-              </a:lnSpc>
-              <a:spcBef>
-                <a:spcPts val="300"/>
-              </a:spcBef>
-              <a:spcAft>
-                <a:spcPts val="300"/>
-              </a:spcAft>
-              <a:buNone/>
-            </a:pPr>
-            <a:r>
-              <a:rPr lang="en-US" sz="1200" dirty="0">
-                <a:solidFill>
-                  <a:srgbClr val="2C2C2C"/>
-                </a:solidFill>
-                <a:latin typeface="Verdana" pitchFamily="34" charset="0"/>
-                <a:ea typeface="Verdana" pitchFamily="34" charset="-122"/>
-                <a:cs typeface="Verdana" pitchFamily="34" charset="-120"/>
-              </a:rPr>
-              <a:t> Take 3–4 answers. </a:t>
-            </a:r>
-            <a:pPr algn="l" indent="0" marL="0">
-              <a:lnSpc>
-                <a:spcPts val="1680"/>
-              </a:lnSpc>
-              <a:spcBef>
-                <a:spcPts val="300"/>
-              </a:spcBef>
-              <a:spcAft>
-                <a:spcPts val="300"/>
-              </a:spcAft>
-              <a:buNone/>
-            </a:pPr>
-            <a:r>
-              <a:rPr lang="en-US" sz="1200" i="1" dirty="0">
-                <a:solidFill>
-                  <a:srgbClr val="2C2C2C"/>
-                </a:solidFill>
-                <a:latin typeface="Verdana" pitchFamily="34" charset="0"/>
-                <a:ea typeface="Verdana" pitchFamily="34" charset="-122"/>
-                <a:cs typeface="Verdana" pitchFamily="34" charset="-120"/>
-              </a:rPr>
-              <a:t>"Did you draw it in your diary?"</a:t>
-            </a:r>
-            <a:pPr algn="l" indent="0" marL="0">
-              <a:lnSpc>
-                <a:spcPts val="1680"/>
-              </a:lnSpc>
-              <a:spcBef>
-                <a:spcPts val="300"/>
-              </a:spcBef>
-              <a:spcAft>
-                <a:spcPts val="300"/>
-              </a:spcAft>
-              <a:buNone/>
-            </a:pPr>
-            <a:r>
-              <a:rPr lang="en-US" sz="1200" dirty="0">
-                <a:solidFill>
-                  <a:srgbClr val="2C2C2C"/>
-                </a:solidFill>
-                <a:latin typeface="Verdana" pitchFamily="34" charset="0"/>
-                <a:ea typeface="Verdana" pitchFamily="34" charset="-122"/>
-                <a:cs typeface="Verdana" pitchFamily="34" charset="-120"/>
-              </a:rPr>
-              <a:t> Show one or two diary drawings.</a:t>
-            </a:r>
-            <a:endParaRPr lang="en-US" sz="1200" dirty="0"/>
-          </a:p>
-        </p:txBody>
-      </p:sp>
-      <p:sp>
-        <p:nvSpPr>
-          <p:cNvPr id="5" name="Text 3"/>
-          <p:cNvSpPr/>
-          <p:nvPr/>
-        </p:nvSpPr>
-        <p:spPr>
-          <a:xfrm>
-            <a:off x="406301" y="1373684"/>
-            <a:ext cx="8498026" cy="213271"/>
-          </a:xfrm>
-          <a:prstGeom prst="rect">
-            <a:avLst/>
-          </a:prstGeom>
-          <a:noFill/>
-          <a:ln/>
-        </p:spPr>
-        <p:txBody>
-          <a:bodyPr wrap="square" lIns="0" tIns="0" rIns="0" bIns="0" rtlCol="0" anchor="t"/>
-          <a:lstStyle/>
-          <a:p>
-            <a:pPr algn="l" indent="0" marL="0">
-              <a:lnSpc>
-                <a:spcPts val="1680"/>
-              </a:lnSpc>
-              <a:spcBef>
-                <a:spcPts val="300"/>
-              </a:spcBef>
-              <a:spcAft>
-                <a:spcPts val="300"/>
-              </a:spcAft>
-              <a:buNone/>
-            </a:pPr>
-            <a:r>
-              <a:rPr lang="en-US" sz="1200" dirty="0">
-                <a:solidFill>
-                  <a:srgbClr val="2C2C2C"/>
-                </a:solidFill>
-                <a:latin typeface="Verdana" pitchFamily="34" charset="0"/>
-                <a:ea typeface="Verdana" pitchFamily="34" charset="-122"/>
-                <a:cs typeface="Verdana" pitchFamily="34" charset="-120"/>
-              </a:rPr>
-              <a:t>Chant once together: </a:t>
-            </a:r>
-            <a:pPr algn="l" indent="0" marL="0">
-              <a:lnSpc>
-                <a:spcPts val="1680"/>
-              </a:lnSpc>
-              <a:spcBef>
-                <a:spcPts val="300"/>
-              </a:spcBef>
-              <a:spcAft>
-                <a:spcPts val="300"/>
-              </a:spcAft>
-              <a:buNone/>
-            </a:pPr>
-            <a:r>
-              <a:rPr lang="en-US" sz="1200" i="1" dirty="0">
-                <a:solidFill>
-                  <a:srgbClr val="2C2C2C"/>
-                </a:solidFill>
-                <a:latin typeface="Verdana" pitchFamily="34" charset="0"/>
-                <a:ea typeface="Verdana" pitchFamily="34" charset="-122"/>
-                <a:cs typeface="Verdana" pitchFamily="34" charset="-120"/>
-              </a:rPr>
-              <a:t>"am - mah - vahs - yah! poor - ni - mah!"</a:t>
-            </a:r>
-            <a:endParaRPr lang="en-US" sz="1200" dirty="0"/>
-          </a:p>
-        </p:txBody>
-      </p:sp>
-      <p:sp>
-        <p:nvSpPr>
-          <p:cNvPr id="6" name="Text 4"/>
           <p:cNvSpPr/>
           <p:nvPr/>
         </p:nvSpPr>
@@ -3756,7 +4351,7 @@
                 <a:ea typeface="Georgia" pitchFamily="34" charset="-122"/>
                 <a:cs typeface="Georgia" pitchFamily="34" charset="-120"/>
               </a:rPr>
-              <a:t>Story (6 min)</a:t>
+              <a:t>Settle + recall (4 min)</a:t>
             </a:r>
             <a:endParaRPr lang="en-US" sz="1800" dirty="0"/>
           </a:p>
@@ -3770,61 +4365,8 @@
         </p:nvSpPr>
         <p:spPr>
           <a:xfrm>
-            <a:off x="406301" y="883593"/>
-            <a:ext cx="8331398" cy="2881313"/>
-          </a:xfrm>
-          <a:prstGeom prst="rect">
-            <a:avLst/>
-          </a:prstGeom>
-          <a:solidFill>
-            <a:srgbClr val="FFFFFF"/>
-          </a:solidFill>
-          <a:ln/>
-        </p:spPr>
-        <p:txBody>
-          <a:bodyPr wrap="square" rtlCol="0" anchor="ctr"/>
-          <a:lstStyle/>
-          <a:p>
-            <a:pPr indent="0" marL="0">
-              <a:buNone/>
-            </a:pPr>
-            <a:endParaRPr lang="en-US" dirty="0"/>
-          </a:p>
-        </p:txBody>
-      </p:sp>
-      <p:sp>
-        <p:nvSpPr>
-          <p:cNvPr id="5" name="Shape 3"/>
-          <p:cNvSpPr/>
-          <p:nvPr/>
-        </p:nvSpPr>
-        <p:spPr>
-          <a:xfrm>
-            <a:off x="434876" y="883593"/>
-            <a:ext cx="0" cy="2881312"/>
-          </a:xfrm>
-          <a:prstGeom prst="line">
-            <a:avLst/>
-          </a:prstGeom>
-          <a:noFill/>
-          <a:ln w="57150">
-            <a:solidFill>
-              <a:srgbClr val="E07A5F"/>
-            </a:solidFill>
-            <a:prstDash val="solid"/>
-          </a:ln>
-        </p:spPr>
-      </p:sp>
-      <p:sp>
-        <p:nvSpPr>
-          <p:cNvPr id="6" name="Text 4"/>
-          <p:cNvSpPr/>
-          <p:nvPr/>
-        </p:nvSpPr>
-        <p:spPr>
-          <a:xfrm>
-            <a:off x="692051" y="1074093"/>
-            <a:ext cx="7973389" cy="230981"/>
+            <a:off x="406301" y="870942"/>
+            <a:ext cx="8498026" cy="426541"/>
           </a:xfrm>
           <a:prstGeom prst="rect">
             <a:avLst/>
@@ -3838,41 +4380,133 @@
           <a:p>
             <a:pPr algn="l" indent="0" marL="0">
               <a:lnSpc>
-                <a:spcPts val="1820"/>
-              </a:lnSpc>
-              <a:spcBef>
-                <a:spcPts val="300"/>
-              </a:spcBef>
-              <a:spcAft>
-                <a:spcPts val="300"/>
-              </a:spcAft>
-              <a:buNone/>
-            </a:pPr>
-            <a:r>
-              <a:rPr lang="en-US" sz="1300" b="1" i="1" dirty="0">
-                <a:solidFill>
-                  <a:srgbClr val="2C2C2C"/>
-                </a:solidFill>
-                <a:latin typeface="Georgia" pitchFamily="34" charset="0"/>
-                <a:ea typeface="Georgia" pitchFamily="34" charset="-122"/>
-                <a:cs typeface="Georgia" pitchFamily="34" charset="-120"/>
-              </a:rPr>
-              <a:t>The Moon takes a journey.</a:t>
-            </a:r>
-            <a:endParaRPr lang="en-US" sz="1300" dirty="0"/>
-          </a:p>
-        </p:txBody>
-      </p:sp>
-      <p:sp>
-        <p:nvSpPr>
-          <p:cNvPr id="7" name="Text 5"/>
+                <a:spcPts val="1680"/>
+              </a:lnSpc>
+              <a:spcBef>
+                <a:spcPts val="300"/>
+              </a:spcBef>
+              <a:spcAft>
+                <a:spcPts val="300"/>
+              </a:spcAft>
+              <a:buNone/>
+            </a:pPr>
+            <a:r>
+              <a:rPr lang="en-US" sz="1200" dirty="0">
+                <a:solidFill>
+                  <a:srgbClr val="2C2C2C"/>
+                </a:solidFill>
+                <a:latin typeface="Verdana" pitchFamily="34" charset="0"/>
+                <a:ea typeface="Verdana" pitchFamily="34" charset="-122"/>
+                <a:cs typeface="Verdana" pitchFamily="34" charset="-120"/>
+              </a:rPr>
+              <a:t>Sit on the mat. Teacher: </a:t>
+            </a:r>
+            <a:pPr algn="l" indent="0" marL="0">
+              <a:lnSpc>
+                <a:spcPts val="1680"/>
+              </a:lnSpc>
+              <a:spcBef>
+                <a:spcPts val="300"/>
+              </a:spcBef>
+              <a:spcAft>
+                <a:spcPts val="300"/>
+              </a:spcAft>
+              <a:buNone/>
+            </a:pPr>
+            <a:r>
+              <a:rPr lang="en-US" sz="1200" i="1" dirty="0">
+                <a:solidFill>
+                  <a:srgbClr val="2C2C2C"/>
+                </a:solidFill>
+                <a:latin typeface="Verdana" pitchFamily="34" charset="0"/>
+                <a:ea typeface="Verdana" pitchFamily="34" charset="-122"/>
+                <a:cs typeface="Verdana" pitchFamily="34" charset="-120"/>
+              </a:rPr>
+              <a:t>"Did anyone see the Moon last night?"</a:t>
+            </a:r>
+            <a:pPr algn="l" indent="0" marL="0">
+              <a:lnSpc>
+                <a:spcPts val="1680"/>
+              </a:lnSpc>
+              <a:spcBef>
+                <a:spcPts val="300"/>
+              </a:spcBef>
+              <a:spcAft>
+                <a:spcPts val="300"/>
+              </a:spcAft>
+              <a:buNone/>
+            </a:pPr>
+            <a:r>
+              <a:rPr lang="en-US" sz="1200" dirty="0">
+                <a:solidFill>
+                  <a:srgbClr val="2C2C2C"/>
+                </a:solidFill>
+                <a:latin typeface="Verdana" pitchFamily="34" charset="0"/>
+                <a:ea typeface="Verdana" pitchFamily="34" charset="-122"/>
+                <a:cs typeface="Verdana" pitchFamily="34" charset="-120"/>
+              </a:rPr>
+              <a:t> Take 3–4 answers. </a:t>
+            </a:r>
+            <a:pPr algn="l" indent="0" marL="0">
+              <a:lnSpc>
+                <a:spcPts val="1680"/>
+              </a:lnSpc>
+              <a:spcBef>
+                <a:spcPts val="300"/>
+              </a:spcBef>
+              <a:spcAft>
+                <a:spcPts val="300"/>
+              </a:spcAft>
+              <a:buNone/>
+            </a:pPr>
+            <a:r>
+              <a:rPr lang="en-US" sz="1200" i="1" dirty="0">
+                <a:solidFill>
+                  <a:srgbClr val="2C2C2C"/>
+                </a:solidFill>
+                <a:latin typeface="Verdana" pitchFamily="34" charset="0"/>
+                <a:ea typeface="Verdana" pitchFamily="34" charset="-122"/>
+                <a:cs typeface="Verdana" pitchFamily="34" charset="-120"/>
+              </a:rPr>
+              <a:t>"Did you draw it in your diary?"</a:t>
+            </a:r>
+            <a:pPr algn="l" indent="0" marL="0">
+              <a:lnSpc>
+                <a:spcPts val="1680"/>
+              </a:lnSpc>
+              <a:spcBef>
+                <a:spcPts val="300"/>
+              </a:spcBef>
+              <a:spcAft>
+                <a:spcPts val="300"/>
+              </a:spcAft>
+              <a:buNone/>
+            </a:pPr>
+            <a:r>
+              <a:rPr lang="en-US" sz="1200" dirty="0">
+                <a:solidFill>
+                  <a:srgbClr val="2C2C2C"/>
+                </a:solidFill>
+                <a:latin typeface="Verdana" pitchFamily="34" charset="0"/>
+                <a:ea typeface="Verdana" pitchFamily="34" charset="-122"/>
+                <a:cs typeface="Verdana" pitchFamily="34" charset="-120"/>
+              </a:rPr>
+              <a:t> Show one or two diary drawings.</a:t>
+            </a:r>
+            <a:endParaRPr lang="en-US" sz="1200" dirty="0"/>
+          </a:p>
+        </p:txBody>
+      </p:sp>
+      <p:sp>
+        <p:nvSpPr>
+          <p:cNvPr id="5" name="Text 3"/>
           <p:cNvSpPr/>
           <p:nvPr/>
         </p:nvSpPr>
         <p:spPr>
           <a:xfrm>
-            <a:off x="692051" y="1343174"/>
-            <a:ext cx="7973389" cy="230981"/>
+            <a:off x="406301" y="1373684"/>
+            <a:ext cx="8498026" cy="213271"/>
           </a:xfrm>
           <a:prstGeom prst="rect">
             <a:avLst/>
@@ -3886,594 +4520,57 @@
           <a:p>
             <a:pPr algn="l" indent="0" marL="0">
               <a:lnSpc>
-                <a:spcPts val="1820"/>
-              </a:lnSpc>
-              <a:spcBef>
-                <a:spcPts val="300"/>
-              </a:spcBef>
-              <a:spcAft>
-                <a:spcPts val="300"/>
-              </a:spcAft>
-              <a:buNone/>
-            </a:pPr>
-            <a:r>
-              <a:rPr lang="en-US" sz="1300" i="1" dirty="0">
-                <a:solidFill>
-                  <a:srgbClr val="2C2C2C"/>
-                </a:solidFill>
-                <a:latin typeface="Georgia" pitchFamily="34" charset="0"/>
-                <a:ea typeface="Georgia" pitchFamily="34" charset="-122"/>
-                <a:cs typeface="Georgia" pitchFamily="34" charset="-120"/>
-              </a:rPr>
-              <a:t>The Moon goes around the Earth — but it takes a long time. About 30 days.</a:t>
-            </a:r>
-            <a:endParaRPr lang="en-US" sz="1300" dirty="0"/>
-          </a:p>
-        </p:txBody>
-      </p:sp>
-      <p:sp>
-        <p:nvSpPr>
-          <p:cNvPr id="8" name="Text 6"/>
-          <p:cNvSpPr/>
-          <p:nvPr/>
-        </p:nvSpPr>
-        <p:spPr>
-          <a:xfrm>
-            <a:off x="692051" y="1612255"/>
-            <a:ext cx="7973389" cy="461963"/>
-          </a:xfrm>
-          <a:prstGeom prst="rect">
-            <a:avLst/>
-          </a:prstGeom>
-          <a:noFill/>
-          <a:ln/>
-        </p:spPr>
-        <p:txBody>
-          <a:bodyPr wrap="square" lIns="0" tIns="0" rIns="0" bIns="0" rtlCol="0" anchor="t"/>
-          <a:lstStyle/>
-          <a:p>
-            <a:pPr algn="l" indent="0" marL="0">
-              <a:lnSpc>
-                <a:spcPts val="1820"/>
-              </a:lnSpc>
-              <a:spcBef>
-                <a:spcPts val="300"/>
-              </a:spcBef>
-              <a:spcAft>
-                <a:spcPts val="300"/>
-              </a:spcAft>
-              <a:buNone/>
-            </a:pPr>
-            <a:r>
-              <a:rPr lang="en-US" sz="1300" dirty="0">
-                <a:solidFill>
-                  <a:srgbClr val="2C2C2C"/>
-                </a:solidFill>
-                <a:latin typeface="Georgia" pitchFamily="34" charset="0"/>
-                <a:ea typeface="Georgia" pitchFamily="34" charset="-122"/>
-                <a:cs typeface="Georgia" pitchFamily="34" charset="-120"/>
-              </a:rPr>
-              <a:t>Halfway through the journey, the Moon is on the OPPOSITE side from the Sun. That's when we see the WHOLE bright side. That's </a:t>
-            </a:r>
-            <a:pPr algn="l" indent="0" marL="0">
-              <a:lnSpc>
-                <a:spcPts val="1820"/>
-              </a:lnSpc>
-              <a:spcBef>
-                <a:spcPts val="300"/>
-              </a:spcBef>
-              <a:spcAft>
-                <a:spcPts val="300"/>
-              </a:spcAft>
-              <a:buNone/>
-            </a:pPr>
-            <a:r>
-              <a:rPr lang="en-US" sz="1300" i="1" dirty="0">
-                <a:solidFill>
-                  <a:srgbClr val="2C2C2C"/>
-                </a:solidFill>
-                <a:latin typeface="Georgia" pitchFamily="34" charset="0"/>
-                <a:ea typeface="Georgia" pitchFamily="34" charset="-122"/>
-                <a:cs typeface="Georgia" pitchFamily="34" charset="-120"/>
-              </a:rPr>
-              <a:t>pūrṇimā</a:t>
-            </a:r>
-            <a:pPr algn="l" indent="0" marL="0">
-              <a:lnSpc>
-                <a:spcPts val="1820"/>
-              </a:lnSpc>
-              <a:spcBef>
-                <a:spcPts val="300"/>
-              </a:spcBef>
-              <a:spcAft>
-                <a:spcPts val="300"/>
-              </a:spcAft>
-              <a:buNone/>
-            </a:pPr>
-            <a:r>
-              <a:rPr lang="en-US" sz="1300" dirty="0">
-                <a:solidFill>
-                  <a:srgbClr val="2C2C2C"/>
-                </a:solidFill>
-                <a:latin typeface="Georgia" pitchFamily="34" charset="0"/>
-                <a:ea typeface="Georgia" pitchFamily="34" charset="-122"/>
-                <a:cs typeface="Georgia" pitchFamily="34" charset="-120"/>
-              </a:rPr>
-              <a:t>.</a:t>
-            </a:r>
-            <a:endParaRPr lang="en-US" sz="1300" dirty="0"/>
-          </a:p>
-        </p:txBody>
-      </p:sp>
-      <p:sp>
-        <p:nvSpPr>
-          <p:cNvPr id="9" name="Text 7"/>
-          <p:cNvSpPr/>
-          <p:nvPr/>
-        </p:nvSpPr>
-        <p:spPr>
-          <a:xfrm>
-            <a:off x="692051" y="2112318"/>
-            <a:ext cx="7973389" cy="461963"/>
-          </a:xfrm>
-          <a:prstGeom prst="rect">
-            <a:avLst/>
-          </a:prstGeom>
-          <a:noFill/>
-          <a:ln/>
-        </p:spPr>
-        <p:txBody>
-          <a:bodyPr wrap="square" lIns="0" tIns="0" rIns="0" bIns="0" rtlCol="0" anchor="t"/>
-          <a:lstStyle/>
-          <a:p>
-            <a:pPr algn="l" indent="0" marL="0">
-              <a:lnSpc>
-                <a:spcPts val="1820"/>
-              </a:lnSpc>
-              <a:spcBef>
-                <a:spcPts val="300"/>
-              </a:spcBef>
-              <a:spcAft>
-                <a:spcPts val="300"/>
-              </a:spcAft>
-              <a:buNone/>
-            </a:pPr>
-            <a:r>
-              <a:rPr lang="en-US" sz="1300" dirty="0">
-                <a:solidFill>
-                  <a:srgbClr val="2C2C2C"/>
-                </a:solidFill>
-                <a:latin typeface="Georgia" pitchFamily="34" charset="0"/>
-                <a:ea typeface="Georgia" pitchFamily="34" charset="-122"/>
-                <a:cs typeface="Georgia" pitchFamily="34" charset="-120"/>
-              </a:rPr>
-              <a:t>At the start of the journey — and again at the end — the Moon is on the SAME side as the Sun. We can't see the bright side at all. That's </a:t>
-            </a:r>
-            <a:pPr algn="l" indent="0" marL="0">
-              <a:lnSpc>
-                <a:spcPts val="1820"/>
-              </a:lnSpc>
-              <a:spcBef>
-                <a:spcPts val="300"/>
-              </a:spcBef>
-              <a:spcAft>
-                <a:spcPts val="300"/>
-              </a:spcAft>
-              <a:buNone/>
-            </a:pPr>
-            <a:r>
-              <a:rPr lang="en-US" sz="1300" i="1" dirty="0">
-                <a:solidFill>
-                  <a:srgbClr val="2C2C2C"/>
-                </a:solidFill>
-                <a:latin typeface="Georgia" pitchFamily="34" charset="0"/>
-                <a:ea typeface="Georgia" pitchFamily="34" charset="-122"/>
-                <a:cs typeface="Georgia" pitchFamily="34" charset="-120"/>
-              </a:rPr>
-              <a:t>amāvasyā</a:t>
-            </a:r>
-            <a:pPr algn="l" indent="0" marL="0">
-              <a:lnSpc>
-                <a:spcPts val="1820"/>
-              </a:lnSpc>
-              <a:spcBef>
-                <a:spcPts val="300"/>
-              </a:spcBef>
-              <a:spcAft>
-                <a:spcPts val="300"/>
-              </a:spcAft>
-              <a:buNone/>
-            </a:pPr>
-            <a:r>
-              <a:rPr lang="en-US" sz="1300" dirty="0">
-                <a:solidFill>
-                  <a:srgbClr val="2C2C2C"/>
-                </a:solidFill>
-                <a:latin typeface="Georgia" pitchFamily="34" charset="0"/>
-                <a:ea typeface="Georgia" pitchFamily="34" charset="-122"/>
-                <a:cs typeface="Georgia" pitchFamily="34" charset="-120"/>
-              </a:rPr>
-              <a:t>.</a:t>
-            </a:r>
-            <a:endParaRPr lang="en-US" sz="1300" dirty="0"/>
-          </a:p>
-        </p:txBody>
-      </p:sp>
-      <p:sp>
-        <p:nvSpPr>
-          <p:cNvPr id="10" name="Text 8"/>
-          <p:cNvSpPr/>
-          <p:nvPr/>
-        </p:nvSpPr>
-        <p:spPr>
-          <a:xfrm>
-            <a:off x="692051" y="2612380"/>
-            <a:ext cx="7973389" cy="461963"/>
-          </a:xfrm>
-          <a:prstGeom prst="rect">
-            <a:avLst/>
-          </a:prstGeom>
-          <a:noFill/>
-          <a:ln/>
-        </p:spPr>
-        <p:txBody>
-          <a:bodyPr wrap="square" lIns="0" tIns="0" rIns="0" bIns="0" rtlCol="0" anchor="t"/>
-          <a:lstStyle/>
-          <a:p>
-            <a:pPr algn="l" indent="0" marL="0">
-              <a:lnSpc>
-                <a:spcPts val="1820"/>
-              </a:lnSpc>
-              <a:spcBef>
-                <a:spcPts val="300"/>
-              </a:spcBef>
-              <a:spcAft>
-                <a:spcPts val="300"/>
-              </a:spcAft>
-              <a:buNone/>
-            </a:pPr>
-            <a:r>
-              <a:rPr lang="en-US" sz="1300" dirty="0">
-                <a:solidFill>
-                  <a:srgbClr val="2C2C2C"/>
-                </a:solidFill>
-                <a:latin typeface="Georgia" pitchFamily="34" charset="0"/>
-                <a:ea typeface="Georgia" pitchFamily="34" charset="-122"/>
-                <a:cs typeface="Georgia" pitchFamily="34" charset="-120"/>
-              </a:rPr>
-              <a:t>So between </a:t>
-            </a:r>
-            <a:pPr algn="l" indent="0" marL="0">
-              <a:lnSpc>
-                <a:spcPts val="1820"/>
-              </a:lnSpc>
-              <a:spcBef>
-                <a:spcPts val="300"/>
-              </a:spcBef>
-              <a:spcAft>
-                <a:spcPts val="300"/>
-              </a:spcAft>
-              <a:buNone/>
-            </a:pPr>
-            <a:r>
-              <a:rPr lang="en-US" sz="1300" i="1" dirty="0">
-                <a:solidFill>
-                  <a:srgbClr val="2C2C2C"/>
-                </a:solidFill>
-                <a:latin typeface="Georgia" pitchFamily="34" charset="0"/>
-                <a:ea typeface="Georgia" pitchFamily="34" charset="-122"/>
-                <a:cs typeface="Georgia" pitchFamily="34" charset="-120"/>
-              </a:rPr>
-              <a:t>amāvasyā</a:t>
-            </a:r>
-            <a:pPr algn="l" indent="0" marL="0">
-              <a:lnSpc>
-                <a:spcPts val="1820"/>
-              </a:lnSpc>
-              <a:spcBef>
-                <a:spcPts val="300"/>
-              </a:spcBef>
-              <a:spcAft>
-                <a:spcPts val="300"/>
-              </a:spcAft>
-              <a:buNone/>
-            </a:pPr>
-            <a:r>
-              <a:rPr lang="en-US" sz="1300" dirty="0">
-                <a:solidFill>
-                  <a:srgbClr val="2C2C2C"/>
-                </a:solidFill>
-                <a:latin typeface="Georgia" pitchFamily="34" charset="0"/>
-                <a:ea typeface="Georgia" pitchFamily="34" charset="-122"/>
-                <a:cs typeface="Georgia" pitchFamily="34" charset="-120"/>
-              </a:rPr>
-              <a:t> and </a:t>
-            </a:r>
-            <a:pPr algn="l" indent="0" marL="0">
-              <a:lnSpc>
-                <a:spcPts val="1820"/>
-              </a:lnSpc>
-              <a:spcBef>
-                <a:spcPts val="300"/>
-              </a:spcBef>
-              <a:spcAft>
-                <a:spcPts val="300"/>
-              </a:spcAft>
-              <a:buNone/>
-            </a:pPr>
-            <a:r>
-              <a:rPr lang="en-US" sz="1300" i="1" dirty="0">
-                <a:solidFill>
-                  <a:srgbClr val="2C2C2C"/>
-                </a:solidFill>
-                <a:latin typeface="Georgia" pitchFamily="34" charset="0"/>
-                <a:ea typeface="Georgia" pitchFamily="34" charset="-122"/>
-                <a:cs typeface="Georgia" pitchFamily="34" charset="-120"/>
-              </a:rPr>
-              <a:t>pūrṇimā</a:t>
-            </a:r>
-            <a:pPr algn="l" indent="0" marL="0">
-              <a:lnSpc>
-                <a:spcPts val="1820"/>
-              </a:lnSpc>
-              <a:spcBef>
-                <a:spcPts val="300"/>
-              </a:spcBef>
-              <a:spcAft>
-                <a:spcPts val="300"/>
-              </a:spcAft>
-              <a:buNone/>
-            </a:pPr>
-            <a:r>
-              <a:rPr lang="en-US" sz="1300" dirty="0">
-                <a:solidFill>
-                  <a:srgbClr val="2C2C2C"/>
-                </a:solidFill>
-                <a:latin typeface="Georgia" pitchFamily="34" charset="0"/>
-                <a:ea typeface="Georgia" pitchFamily="34" charset="-122"/>
-                <a:cs typeface="Georgia" pitchFamily="34" charset="-120"/>
-              </a:rPr>
-              <a:t> — the FIRST half of the journey — the Moon gets bigger and bigger every night. That's the </a:t>
-            </a:r>
-            <a:pPr algn="l" indent="0" marL="0">
-              <a:lnSpc>
-                <a:spcPts val="1820"/>
-              </a:lnSpc>
-              <a:spcBef>
-                <a:spcPts val="300"/>
-              </a:spcBef>
-              <a:spcAft>
-                <a:spcPts val="300"/>
-              </a:spcAft>
-              <a:buNone/>
-            </a:pPr>
-            <a:r>
-              <a:rPr lang="en-US" sz="1300" b="1" i="1" dirty="0">
-                <a:solidFill>
-                  <a:srgbClr val="2C2C2C"/>
-                </a:solidFill>
-                <a:latin typeface="Georgia" pitchFamily="34" charset="0"/>
-                <a:ea typeface="Georgia" pitchFamily="34" charset="-122"/>
-                <a:cs typeface="Georgia" pitchFamily="34" charset="-120"/>
-              </a:rPr>
-              <a:t>growing half</a:t>
-            </a:r>
-            <a:pPr algn="l" indent="0" marL="0">
-              <a:lnSpc>
-                <a:spcPts val="1820"/>
-              </a:lnSpc>
-              <a:spcBef>
-                <a:spcPts val="300"/>
-              </a:spcBef>
-              <a:spcAft>
-                <a:spcPts val="300"/>
-              </a:spcAft>
-              <a:buNone/>
-            </a:pPr>
-            <a:r>
-              <a:rPr lang="en-US" sz="1300" dirty="0">
-                <a:solidFill>
-                  <a:srgbClr val="2C2C2C"/>
-                </a:solidFill>
-                <a:latin typeface="Georgia" pitchFamily="34" charset="0"/>
-                <a:ea typeface="Georgia" pitchFamily="34" charset="-122"/>
-                <a:cs typeface="Georgia" pitchFamily="34" charset="-120"/>
-              </a:rPr>
-              <a:t>.</a:t>
-            </a:r>
-            <a:endParaRPr lang="en-US" sz="1300" dirty="0"/>
-          </a:p>
-        </p:txBody>
-      </p:sp>
-      <p:sp>
-        <p:nvSpPr>
-          <p:cNvPr id="11" name="Text 9"/>
-          <p:cNvSpPr/>
-          <p:nvPr/>
-        </p:nvSpPr>
-        <p:spPr>
-          <a:xfrm>
-            <a:off x="692051" y="3112443"/>
-            <a:ext cx="7973389" cy="461963"/>
-          </a:xfrm>
-          <a:prstGeom prst="rect">
-            <a:avLst/>
-          </a:prstGeom>
-          <a:noFill/>
-          <a:ln/>
-        </p:spPr>
-        <p:txBody>
-          <a:bodyPr wrap="square" lIns="0" tIns="0" rIns="0" bIns="0" rtlCol="0" anchor="t"/>
-          <a:lstStyle/>
-          <a:p>
-            <a:pPr algn="l" indent="0" marL="0">
-              <a:lnSpc>
-                <a:spcPts val="1820"/>
-              </a:lnSpc>
-              <a:spcBef>
-                <a:spcPts val="300"/>
-              </a:spcBef>
-              <a:spcAft>
-                <a:spcPts val="300"/>
-              </a:spcAft>
-              <a:buNone/>
-            </a:pPr>
-            <a:r>
-              <a:rPr lang="en-US" sz="1300" dirty="0">
-                <a:solidFill>
-                  <a:srgbClr val="2C2C2C"/>
-                </a:solidFill>
-                <a:latin typeface="Georgia" pitchFamily="34" charset="0"/>
-                <a:ea typeface="Georgia" pitchFamily="34" charset="-122"/>
-                <a:cs typeface="Georgia" pitchFamily="34" charset="-120"/>
-              </a:rPr>
-              <a:t>Between </a:t>
-            </a:r>
-            <a:pPr algn="l" indent="0" marL="0">
-              <a:lnSpc>
-                <a:spcPts val="1820"/>
-              </a:lnSpc>
-              <a:spcBef>
-                <a:spcPts val="300"/>
-              </a:spcBef>
-              <a:spcAft>
-                <a:spcPts val="300"/>
-              </a:spcAft>
-              <a:buNone/>
-            </a:pPr>
-            <a:r>
-              <a:rPr lang="en-US" sz="1300" i="1" dirty="0">
-                <a:solidFill>
-                  <a:srgbClr val="2C2C2C"/>
-                </a:solidFill>
-                <a:latin typeface="Georgia" pitchFamily="34" charset="0"/>
-                <a:ea typeface="Georgia" pitchFamily="34" charset="-122"/>
-                <a:cs typeface="Georgia" pitchFamily="34" charset="-120"/>
-              </a:rPr>
-              <a:t>pūrṇimā</a:t>
-            </a:r>
-            <a:pPr algn="l" indent="0" marL="0">
-              <a:lnSpc>
-                <a:spcPts val="1820"/>
-              </a:lnSpc>
-              <a:spcBef>
-                <a:spcPts val="300"/>
-              </a:spcBef>
-              <a:spcAft>
-                <a:spcPts val="300"/>
-              </a:spcAft>
-              <a:buNone/>
-            </a:pPr>
-            <a:r>
-              <a:rPr lang="en-US" sz="1300" dirty="0">
-                <a:solidFill>
-                  <a:srgbClr val="2C2C2C"/>
-                </a:solidFill>
-                <a:latin typeface="Georgia" pitchFamily="34" charset="0"/>
-                <a:ea typeface="Georgia" pitchFamily="34" charset="-122"/>
-                <a:cs typeface="Georgia" pitchFamily="34" charset="-120"/>
-              </a:rPr>
-              <a:t> and </a:t>
-            </a:r>
-            <a:pPr algn="l" indent="0" marL="0">
-              <a:lnSpc>
-                <a:spcPts val="1820"/>
-              </a:lnSpc>
-              <a:spcBef>
-                <a:spcPts val="300"/>
-              </a:spcBef>
-              <a:spcAft>
-                <a:spcPts val="300"/>
-              </a:spcAft>
-              <a:buNone/>
-            </a:pPr>
-            <a:r>
-              <a:rPr lang="en-US" sz="1300" i="1" dirty="0">
-                <a:solidFill>
-                  <a:srgbClr val="2C2C2C"/>
-                </a:solidFill>
-                <a:latin typeface="Georgia" pitchFamily="34" charset="0"/>
-                <a:ea typeface="Georgia" pitchFamily="34" charset="-122"/>
-                <a:cs typeface="Georgia" pitchFamily="34" charset="-120"/>
-              </a:rPr>
-              <a:t>amāvasyā</a:t>
-            </a:r>
-            <a:pPr algn="l" indent="0" marL="0">
-              <a:lnSpc>
-                <a:spcPts val="1820"/>
-              </a:lnSpc>
-              <a:spcBef>
-                <a:spcPts val="300"/>
-              </a:spcBef>
-              <a:spcAft>
-                <a:spcPts val="300"/>
-              </a:spcAft>
-              <a:buNone/>
-            </a:pPr>
-            <a:r>
-              <a:rPr lang="en-US" sz="1300" dirty="0">
-                <a:solidFill>
-                  <a:srgbClr val="2C2C2C"/>
-                </a:solidFill>
-                <a:latin typeface="Georgia" pitchFamily="34" charset="0"/>
-                <a:ea typeface="Georgia" pitchFamily="34" charset="-122"/>
-                <a:cs typeface="Georgia" pitchFamily="34" charset="-120"/>
-              </a:rPr>
-              <a:t> — the SECOND half of the journey — the Moon gets smaller and smaller. That's the </a:t>
-            </a:r>
-            <a:pPr algn="l" indent="0" marL="0">
-              <a:lnSpc>
-                <a:spcPts val="1820"/>
-              </a:lnSpc>
-              <a:spcBef>
-                <a:spcPts val="300"/>
-              </a:spcBef>
-              <a:spcAft>
-                <a:spcPts val="300"/>
-              </a:spcAft>
-              <a:buNone/>
-            </a:pPr>
-            <a:r>
-              <a:rPr lang="en-US" sz="1300" b="1" i="1" dirty="0">
-                <a:solidFill>
-                  <a:srgbClr val="2C2C2C"/>
-                </a:solidFill>
-                <a:latin typeface="Georgia" pitchFamily="34" charset="0"/>
-                <a:ea typeface="Georgia" pitchFamily="34" charset="-122"/>
-                <a:cs typeface="Georgia" pitchFamily="34" charset="-120"/>
-              </a:rPr>
-              <a:t>shrinking half</a:t>
-            </a:r>
-            <a:pPr algn="l" indent="0" marL="0">
-              <a:lnSpc>
-                <a:spcPts val="1820"/>
-              </a:lnSpc>
-              <a:spcBef>
-                <a:spcPts val="300"/>
-              </a:spcBef>
-              <a:spcAft>
-                <a:spcPts val="300"/>
-              </a:spcAft>
-              <a:buNone/>
-            </a:pPr>
-            <a:r>
-              <a:rPr lang="en-US" sz="1300" dirty="0">
-                <a:solidFill>
-                  <a:srgbClr val="2C2C2C"/>
-                </a:solidFill>
-                <a:latin typeface="Georgia" pitchFamily="34" charset="0"/>
-                <a:ea typeface="Georgia" pitchFamily="34" charset="-122"/>
-                <a:cs typeface="Georgia" pitchFamily="34" charset="-120"/>
-              </a:rPr>
-              <a:t>.</a:t>
-            </a:r>
-            <a:endParaRPr lang="en-US" sz="1300" dirty="0"/>
-          </a:p>
-        </p:txBody>
-      </p:sp>
-      <p:sp>
-        <p:nvSpPr>
-          <p:cNvPr id="12" name="Text 10"/>
+                <a:spcPts val="1680"/>
+              </a:lnSpc>
+              <a:spcBef>
+                <a:spcPts val="300"/>
+              </a:spcBef>
+              <a:spcAft>
+                <a:spcPts val="300"/>
+              </a:spcAft>
+              <a:buNone/>
+            </a:pPr>
+            <a:r>
+              <a:rPr lang="en-US" sz="1200" dirty="0">
+                <a:solidFill>
+                  <a:srgbClr val="2C2C2C"/>
+                </a:solidFill>
+                <a:latin typeface="Verdana" pitchFamily="34" charset="0"/>
+                <a:ea typeface="Verdana" pitchFamily="34" charset="-122"/>
+                <a:cs typeface="Verdana" pitchFamily="34" charset="-120"/>
+              </a:rPr>
+              <a:t>Chant once together: </a:t>
+            </a:r>
+            <a:pPr algn="l" indent="0" marL="0">
+              <a:lnSpc>
+                <a:spcPts val="1680"/>
+              </a:lnSpc>
+              <a:spcBef>
+                <a:spcPts val="300"/>
+              </a:spcBef>
+              <a:spcAft>
+                <a:spcPts val="300"/>
+              </a:spcAft>
+              <a:buNone/>
+            </a:pPr>
+            <a:r>
+              <a:rPr lang="en-US" sz="1200" i="1" dirty="0">
+                <a:solidFill>
+                  <a:srgbClr val="2C2C2C"/>
+                </a:solidFill>
+                <a:latin typeface="Verdana" pitchFamily="34" charset="0"/>
+                <a:ea typeface="Verdana" pitchFamily="34" charset="-122"/>
+                <a:cs typeface="Verdana" pitchFamily="34" charset="-120"/>
+              </a:rPr>
+              <a:t>"am - mah - vahs - yah! poor - ni - mah!"</a:t>
+            </a:r>
+            <a:endParaRPr lang="en-US" sz="1200" dirty="0"/>
+          </a:p>
+        </p:txBody>
+      </p:sp>
+      <p:sp>
+        <p:nvSpPr>
+          <p:cNvPr id="6" name="Text 4"/>
           <p:cNvSpPr/>
           <p:nvPr/>
         </p:nvSpPr>
@@ -4623,7 +4720,7 @@
                 <a:ea typeface="Georgia" pitchFamily="34" charset="-122"/>
                 <a:cs typeface="Georgia" pitchFamily="34" charset="-120"/>
               </a:rPr>
-              <a:t>Demo + walk (10 min)</a:t>
+              <a:t>Story (6 min)</a:t>
             </a:r>
             <a:endParaRPr lang="en-US" sz="1800" dirty="0"/>
           </a:p>
@@ -4637,8 +4734,61 @@
         </p:nvSpPr>
         <p:spPr>
           <a:xfrm>
-            <a:off x="406301" y="870942"/>
-            <a:ext cx="8498026" cy="426541"/>
+            <a:off x="406301" y="883593"/>
+            <a:ext cx="8331398" cy="2881313"/>
+          </a:xfrm>
+          <a:prstGeom prst="rect">
+            <a:avLst/>
+          </a:prstGeom>
+          <a:solidFill>
+            <a:srgbClr val="FFFFFF"/>
+          </a:solidFill>
+          <a:ln/>
+        </p:spPr>
+        <p:txBody>
+          <a:bodyPr wrap="square" rtlCol="0" anchor="ctr"/>
+          <a:lstStyle/>
+          <a:p>
+            <a:pPr indent="0" marL="0">
+              <a:buNone/>
+            </a:pPr>
+            <a:endParaRPr lang="en-US" dirty="0"/>
+          </a:p>
+        </p:txBody>
+      </p:sp>
+      <p:sp>
+        <p:nvSpPr>
+          <p:cNvPr id="5" name="Shape 3"/>
+          <p:cNvSpPr/>
+          <p:nvPr/>
+        </p:nvSpPr>
+        <p:spPr>
+          <a:xfrm>
+            <a:off x="434876" y="883593"/>
+            <a:ext cx="0" cy="2881312"/>
+          </a:xfrm>
+          <a:prstGeom prst="line">
+            <a:avLst/>
+          </a:prstGeom>
+          <a:noFill/>
+          <a:ln w="57150">
+            <a:solidFill>
+              <a:srgbClr val="E07A5F"/>
+            </a:solidFill>
+            <a:prstDash val="solid"/>
+          </a:ln>
+        </p:spPr>
+      </p:sp>
+      <p:sp>
+        <p:nvSpPr>
+          <p:cNvPr id="6" name="Text 4"/>
+          <p:cNvSpPr/>
+          <p:nvPr/>
+        </p:nvSpPr>
+        <p:spPr>
+          <a:xfrm>
+            <a:off x="692051" y="1074093"/>
+            <a:ext cx="7973389" cy="230981"/>
           </a:xfrm>
           <a:prstGeom prst="rect">
             <a:avLst/>
@@ -4652,133 +4802,41 @@
           <a:p>
             <a:pPr algn="l" indent="0" marL="0">
               <a:lnSpc>
-                <a:spcPts val="1680"/>
-              </a:lnSpc>
-              <a:spcBef>
-                <a:spcPts val="300"/>
-              </a:spcBef>
-              <a:spcAft>
-                <a:spcPts val="300"/>
-              </a:spcAft>
-              <a:buNone/>
-            </a:pPr>
-            <a:r>
-              <a:rPr lang="en-US" sz="1200" dirty="0">
-                <a:solidFill>
-                  <a:srgbClr val="2C2C2C"/>
-                </a:solidFill>
-                <a:latin typeface="Verdana" pitchFamily="34" charset="0"/>
-                <a:ea typeface="Verdana" pitchFamily="34" charset="-122"/>
-                <a:cs typeface="Verdana" pitchFamily="34" charset="-120"/>
-              </a:rPr>
-              <a:t>Draw a long line on the floor (or on the board). At the left end write </a:t>
-            </a:r>
-            <a:pPr algn="l" indent="0" marL="0">
-              <a:lnSpc>
-                <a:spcPts val="1680"/>
-              </a:lnSpc>
-              <a:spcBef>
-                <a:spcPts val="300"/>
-              </a:spcBef>
-              <a:spcAft>
-                <a:spcPts val="300"/>
-              </a:spcAft>
-              <a:buNone/>
-            </a:pPr>
-            <a:r>
-              <a:rPr lang="en-US" sz="1200" i="1" dirty="0">
-                <a:solidFill>
-                  <a:srgbClr val="2C2C2C"/>
-                </a:solidFill>
-                <a:latin typeface="Verdana" pitchFamily="34" charset="0"/>
-                <a:ea typeface="Verdana" pitchFamily="34" charset="-122"/>
-                <a:cs typeface="Verdana" pitchFamily="34" charset="-120"/>
-              </a:rPr>
-              <a:t>amāvasyā</a:t>
-            </a:r>
-            <a:pPr algn="l" indent="0" marL="0">
-              <a:lnSpc>
-                <a:spcPts val="1680"/>
-              </a:lnSpc>
-              <a:spcBef>
-                <a:spcPts val="300"/>
-              </a:spcBef>
-              <a:spcAft>
-                <a:spcPts val="300"/>
-              </a:spcAft>
-              <a:buNone/>
-            </a:pPr>
-            <a:r>
-              <a:rPr lang="en-US" sz="1200" dirty="0">
-                <a:solidFill>
-                  <a:srgbClr val="2C2C2C"/>
-                </a:solidFill>
-                <a:latin typeface="Verdana" pitchFamily="34" charset="0"/>
-                <a:ea typeface="Verdana" pitchFamily="34" charset="-122"/>
-                <a:cs typeface="Verdana" pitchFamily="34" charset="-120"/>
-              </a:rPr>
-              <a:t> and draw a dark circle. At the right end write </a:t>
-            </a:r>
-            <a:pPr algn="l" indent="0" marL="0">
-              <a:lnSpc>
-                <a:spcPts val="1680"/>
-              </a:lnSpc>
-              <a:spcBef>
-                <a:spcPts val="300"/>
-              </a:spcBef>
-              <a:spcAft>
-                <a:spcPts val="300"/>
-              </a:spcAft>
-              <a:buNone/>
-            </a:pPr>
-            <a:r>
-              <a:rPr lang="en-US" sz="1200" i="1" dirty="0">
-                <a:solidFill>
-                  <a:srgbClr val="2C2C2C"/>
-                </a:solidFill>
-                <a:latin typeface="Verdana" pitchFamily="34" charset="0"/>
-                <a:ea typeface="Verdana" pitchFamily="34" charset="-122"/>
-                <a:cs typeface="Verdana" pitchFamily="34" charset="-120"/>
-              </a:rPr>
-              <a:t>pūrṇimā</a:t>
-            </a:r>
-            <a:pPr algn="l" indent="0" marL="0">
-              <a:lnSpc>
-                <a:spcPts val="1680"/>
-              </a:lnSpc>
-              <a:spcBef>
-                <a:spcPts val="300"/>
-              </a:spcBef>
-              <a:spcAft>
-                <a:spcPts val="300"/>
-              </a:spcAft>
-              <a:buNone/>
-            </a:pPr>
-            <a:r>
-              <a:rPr lang="en-US" sz="1200" dirty="0">
-                <a:solidFill>
-                  <a:srgbClr val="2C2C2C"/>
-                </a:solidFill>
-                <a:latin typeface="Verdana" pitchFamily="34" charset="0"/>
-                <a:ea typeface="Verdana" pitchFamily="34" charset="-122"/>
-                <a:cs typeface="Verdana" pitchFamily="34" charset="-120"/>
-              </a:rPr>
-              <a:t> and draw a bright full circle.</a:t>
-            </a:r>
-            <a:endParaRPr lang="en-US" sz="1200" dirty="0"/>
-          </a:p>
-        </p:txBody>
-      </p:sp>
-      <p:sp>
-        <p:nvSpPr>
-          <p:cNvPr id="5" name="Text 3"/>
+                <a:spcPts val="1820"/>
+              </a:lnSpc>
+              <a:spcBef>
+                <a:spcPts val="300"/>
+              </a:spcBef>
+              <a:spcAft>
+                <a:spcPts val="300"/>
+              </a:spcAft>
+              <a:buNone/>
+            </a:pPr>
+            <a:r>
+              <a:rPr lang="en-US" sz="1300" b="1" i="1" dirty="0">
+                <a:solidFill>
+                  <a:srgbClr val="2C2C2C"/>
+                </a:solidFill>
+                <a:latin typeface="Georgia" pitchFamily="34" charset="0"/>
+                <a:ea typeface="Georgia" pitchFamily="34" charset="-122"/>
+                <a:cs typeface="Georgia" pitchFamily="34" charset="-120"/>
+              </a:rPr>
+              <a:t>The Moon takes a journey.</a:t>
+            </a:r>
+            <a:endParaRPr lang="en-US" sz="1300" dirty="0"/>
+          </a:p>
+        </p:txBody>
+      </p:sp>
+      <p:sp>
+        <p:nvSpPr>
+          <p:cNvPr id="7" name="Text 5"/>
           <p:cNvSpPr/>
           <p:nvPr/>
         </p:nvSpPr>
         <p:spPr>
           <a:xfrm>
-            <a:off x="406301" y="1373684"/>
-            <a:ext cx="8498026" cy="213271"/>
+            <a:off x="692051" y="1343174"/>
+            <a:ext cx="7973389" cy="230981"/>
           </a:xfrm>
           <a:prstGeom prst="rect">
             <a:avLst/>
@@ -4792,41 +4850,41 @@
           <a:p>
             <a:pPr algn="l" indent="0" marL="0">
               <a:lnSpc>
-                <a:spcPts val="1680"/>
-              </a:lnSpc>
-              <a:spcBef>
-                <a:spcPts val="300"/>
-              </a:spcBef>
-              <a:spcAft>
-                <a:spcPts val="300"/>
-              </a:spcAft>
-              <a:buNone/>
-            </a:pPr>
-            <a:r>
-              <a:rPr lang="en-US" sz="1200" dirty="0">
-                <a:solidFill>
-                  <a:srgbClr val="2C2C2C"/>
-                </a:solidFill>
-                <a:latin typeface="Verdana" pitchFamily="34" charset="0"/>
-                <a:ea typeface="Verdana" pitchFamily="34" charset="-122"/>
-                <a:cs typeface="Verdana" pitchFamily="34" charset="-120"/>
-              </a:rPr>
-              <a:t>In the middle, draw 5 stages between them — a thin sliver, a half-moon, a 3/4 moon, etc.</a:t>
-            </a:r>
-            <a:endParaRPr lang="en-US" sz="1200" dirty="0"/>
-          </a:p>
-        </p:txBody>
-      </p:sp>
-      <p:sp>
-        <p:nvSpPr>
-          <p:cNvPr id="6" name="Text 4"/>
+                <a:spcPts val="1820"/>
+              </a:lnSpc>
+              <a:spcBef>
+                <a:spcPts val="300"/>
+              </a:spcBef>
+              <a:spcAft>
+                <a:spcPts val="300"/>
+              </a:spcAft>
+              <a:buNone/>
+            </a:pPr>
+            <a:r>
+              <a:rPr lang="en-US" sz="1300" i="1" dirty="0">
+                <a:solidFill>
+                  <a:srgbClr val="2C2C2C"/>
+                </a:solidFill>
+                <a:latin typeface="Georgia" pitchFamily="34" charset="0"/>
+                <a:ea typeface="Georgia" pitchFamily="34" charset="-122"/>
+                <a:cs typeface="Georgia" pitchFamily="34" charset="-120"/>
+              </a:rPr>
+              <a:t>The Moon goes around the Earth — but it takes a long time. About 30 days.</a:t>
+            </a:r>
+            <a:endParaRPr lang="en-US" sz="1300" dirty="0"/>
+          </a:p>
+        </p:txBody>
+      </p:sp>
+      <p:sp>
+        <p:nvSpPr>
+          <p:cNvPr id="8" name="Text 6"/>
           <p:cNvSpPr/>
           <p:nvPr/>
         </p:nvSpPr>
         <p:spPr>
           <a:xfrm>
-            <a:off x="406301" y="1663154"/>
-            <a:ext cx="8498026" cy="213271"/>
+            <a:off x="692051" y="1612255"/>
+            <a:ext cx="7973389" cy="461963"/>
           </a:xfrm>
           <a:prstGeom prst="rect">
             <a:avLst/>
@@ -4840,133 +4898,87 @@
           <a:p>
             <a:pPr algn="l" indent="0" marL="0">
               <a:lnSpc>
-                <a:spcPts val="1680"/>
-              </a:lnSpc>
-              <a:spcBef>
-                <a:spcPts val="300"/>
-              </a:spcBef>
-              <a:spcAft>
-                <a:spcPts val="300"/>
-              </a:spcAft>
-              <a:buNone/>
-            </a:pPr>
-            <a:r>
-              <a:rPr lang="en-US" sz="1200" dirty="0">
-                <a:solidFill>
-                  <a:srgbClr val="2C2C2C"/>
-                </a:solidFill>
-                <a:latin typeface="Verdana" pitchFamily="34" charset="0"/>
-                <a:ea typeface="Verdana" pitchFamily="34" charset="-122"/>
-                <a:cs typeface="Verdana" pitchFamily="34" charset="-120"/>
-              </a:rPr>
-              <a:t>Now do the same for the second half — </a:t>
-            </a:r>
-            <a:pPr algn="l" indent="0" marL="0">
-              <a:lnSpc>
-                <a:spcPts val="1680"/>
-              </a:lnSpc>
-              <a:spcBef>
-                <a:spcPts val="300"/>
-              </a:spcBef>
-              <a:spcAft>
-                <a:spcPts val="300"/>
-              </a:spcAft>
-              <a:buNone/>
-            </a:pPr>
-            <a:r>
-              <a:rPr lang="en-US" sz="1200" i="1" dirty="0">
-                <a:solidFill>
-                  <a:srgbClr val="2C2C2C"/>
-                </a:solidFill>
-                <a:latin typeface="Verdana" pitchFamily="34" charset="0"/>
-                <a:ea typeface="Verdana" pitchFamily="34" charset="-122"/>
-                <a:cs typeface="Verdana" pitchFamily="34" charset="-120"/>
+                <a:spcPts val="1820"/>
+              </a:lnSpc>
+              <a:spcBef>
+                <a:spcPts val="300"/>
+              </a:spcBef>
+              <a:spcAft>
+                <a:spcPts val="300"/>
+              </a:spcAft>
+              <a:buNone/>
+            </a:pPr>
+            <a:r>
+              <a:rPr lang="en-US" sz="1300" dirty="0">
+                <a:solidFill>
+                  <a:srgbClr val="2C2C2C"/>
+                </a:solidFill>
+                <a:latin typeface="Georgia" pitchFamily="34" charset="0"/>
+                <a:ea typeface="Georgia" pitchFamily="34" charset="-122"/>
+                <a:cs typeface="Georgia" pitchFamily="34" charset="-120"/>
+              </a:rPr>
+              <a:t>Halfway through the journey, the Moon is on the OPPOSITE side from the Sun. That's when we see the WHOLE bright side. That's </a:t>
+            </a:r>
+            <a:pPr algn="l" indent="0" marL="0">
+              <a:lnSpc>
+                <a:spcPts val="1820"/>
+              </a:lnSpc>
+              <a:spcBef>
+                <a:spcPts val="300"/>
+              </a:spcBef>
+              <a:spcAft>
+                <a:spcPts val="300"/>
+              </a:spcAft>
+              <a:buNone/>
+            </a:pPr>
+            <a:r>
+              <a:rPr lang="en-US" sz="1300" i="1" dirty="0">
+                <a:solidFill>
+                  <a:srgbClr val="2C2C2C"/>
+                </a:solidFill>
+                <a:latin typeface="Georgia" pitchFamily="34" charset="0"/>
+                <a:ea typeface="Georgia" pitchFamily="34" charset="-122"/>
+                <a:cs typeface="Georgia" pitchFamily="34" charset="-120"/>
               </a:rPr>
               <a:t>pūrṇimā</a:t>
             </a:r>
             <a:pPr algn="l" indent="0" marL="0">
               <a:lnSpc>
-                <a:spcPts val="1680"/>
-              </a:lnSpc>
-              <a:spcBef>
-                <a:spcPts val="300"/>
-              </a:spcBef>
-              <a:spcAft>
-                <a:spcPts val="300"/>
-              </a:spcAft>
-              <a:buNone/>
-            </a:pPr>
-            <a:r>
-              <a:rPr lang="en-US" sz="1200" dirty="0">
-                <a:solidFill>
-                  <a:srgbClr val="2C2C2C"/>
-                </a:solidFill>
-                <a:latin typeface="Verdana" pitchFamily="34" charset="0"/>
-                <a:ea typeface="Verdana" pitchFamily="34" charset="-122"/>
-                <a:cs typeface="Verdana" pitchFamily="34" charset="-120"/>
-              </a:rPr>
-              <a:t> shrinks back through 3/4, half, sliver, to </a:t>
-            </a:r>
-            <a:pPr algn="l" indent="0" marL="0">
-              <a:lnSpc>
-                <a:spcPts val="1680"/>
-              </a:lnSpc>
-              <a:spcBef>
-                <a:spcPts val="300"/>
-              </a:spcBef>
-              <a:spcAft>
-                <a:spcPts val="300"/>
-              </a:spcAft>
-              <a:buNone/>
-            </a:pPr>
-            <a:r>
-              <a:rPr lang="en-US" sz="1200" i="1" dirty="0">
-                <a:solidFill>
-                  <a:srgbClr val="2C2C2C"/>
-                </a:solidFill>
-                <a:latin typeface="Verdana" pitchFamily="34" charset="0"/>
-                <a:ea typeface="Verdana" pitchFamily="34" charset="-122"/>
-                <a:cs typeface="Verdana" pitchFamily="34" charset="-120"/>
-              </a:rPr>
-              <a:t>amāvasyā</a:t>
-            </a:r>
-            <a:pPr algn="l" indent="0" marL="0">
-              <a:lnSpc>
-                <a:spcPts val="1680"/>
-              </a:lnSpc>
-              <a:spcBef>
-                <a:spcPts val="300"/>
-              </a:spcBef>
-              <a:spcAft>
-                <a:spcPts val="300"/>
-              </a:spcAft>
-              <a:buNone/>
-            </a:pPr>
-            <a:r>
-              <a:rPr lang="en-US" sz="1200" dirty="0">
-                <a:solidFill>
-                  <a:srgbClr val="2C2C2C"/>
-                </a:solidFill>
-                <a:latin typeface="Verdana" pitchFamily="34" charset="0"/>
-                <a:ea typeface="Verdana" pitchFamily="34" charset="-122"/>
-                <a:cs typeface="Verdana" pitchFamily="34" charset="-120"/>
+                <a:spcPts val="1820"/>
+              </a:lnSpc>
+              <a:spcBef>
+                <a:spcPts val="300"/>
+              </a:spcBef>
+              <a:spcAft>
+                <a:spcPts val="300"/>
+              </a:spcAft>
+              <a:buNone/>
+            </a:pPr>
+            <a:r>
+              <a:rPr lang="en-US" sz="1300" dirty="0">
+                <a:solidFill>
+                  <a:srgbClr val="2C2C2C"/>
+                </a:solidFill>
+                <a:latin typeface="Georgia" pitchFamily="34" charset="0"/>
+                <a:ea typeface="Georgia" pitchFamily="34" charset="-122"/>
+                <a:cs typeface="Georgia" pitchFamily="34" charset="-120"/>
               </a:rPr>
               <a:t>.</a:t>
             </a:r>
-            <a:endParaRPr lang="en-US" sz="1200" dirty="0"/>
-          </a:p>
-        </p:txBody>
-      </p:sp>
-      <p:sp>
-        <p:nvSpPr>
-          <p:cNvPr id="7" name="Text 5"/>
+            <a:endParaRPr lang="en-US" sz="1300" dirty="0"/>
+          </a:p>
+        </p:txBody>
+      </p:sp>
+      <p:sp>
+        <p:nvSpPr>
+          <p:cNvPr id="9" name="Text 7"/>
           <p:cNvSpPr/>
           <p:nvPr/>
         </p:nvSpPr>
         <p:spPr>
           <a:xfrm>
-            <a:off x="406301" y="1952625"/>
-            <a:ext cx="8498026" cy="426541"/>
+            <a:off x="692051" y="2112318"/>
+            <a:ext cx="7973389" cy="461963"/>
           </a:xfrm>
           <a:prstGeom prst="rect">
             <a:avLst/>
@@ -4980,34 +4992,452 @@
           <a:p>
             <a:pPr algn="l" indent="0" marL="0">
               <a:lnSpc>
-                <a:spcPts val="1680"/>
-              </a:lnSpc>
-              <a:spcBef>
-                <a:spcPts val="300"/>
-              </a:spcBef>
-              <a:spcAft>
-                <a:spcPts val="300"/>
-              </a:spcAft>
-              <a:buNone/>
-            </a:pPr>
-            <a:r>
-              <a:rPr lang="en-US" sz="1200" dirty="0">
-                <a:solidFill>
-                  <a:srgbClr val="2C2C2C"/>
-                </a:solidFill>
-                <a:latin typeface="Verdana" pitchFamily="34" charset="0"/>
-                <a:ea typeface="Verdana" pitchFamily="34" charset="-122"/>
-                <a:cs typeface="Verdana" pitchFamily="34" charset="-120"/>
-              </a:rPr>
-              <a:t>Have 5 children walk along the line, holding a paper Moon shape at each station. The rest of the class chants "GROWING" while they walk left-to-right and "SHRINKING" while they walk right-to-left.</a:t>
-            </a:r>
-            <a:endParaRPr lang="en-US" sz="1200" dirty="0"/>
-          </a:p>
-        </p:txBody>
-      </p:sp>
-      <p:sp>
-        <p:nvSpPr>
-          <p:cNvPr id="8" name="Text 6"/>
+                <a:spcPts val="1820"/>
+              </a:lnSpc>
+              <a:spcBef>
+                <a:spcPts val="300"/>
+              </a:spcBef>
+              <a:spcAft>
+                <a:spcPts val="300"/>
+              </a:spcAft>
+              <a:buNone/>
+            </a:pPr>
+            <a:r>
+              <a:rPr lang="en-US" sz="1300" dirty="0">
+                <a:solidFill>
+                  <a:srgbClr val="2C2C2C"/>
+                </a:solidFill>
+                <a:latin typeface="Georgia" pitchFamily="34" charset="0"/>
+                <a:ea typeface="Georgia" pitchFamily="34" charset="-122"/>
+                <a:cs typeface="Georgia" pitchFamily="34" charset="-120"/>
+              </a:rPr>
+              <a:t>At the start of the journey — and again at the end — the Moon is on the SAME side as the Sun. We can't see the bright side at all. That's </a:t>
+            </a:r>
+            <a:pPr algn="l" indent="0" marL="0">
+              <a:lnSpc>
+                <a:spcPts val="1820"/>
+              </a:lnSpc>
+              <a:spcBef>
+                <a:spcPts val="300"/>
+              </a:spcBef>
+              <a:spcAft>
+                <a:spcPts val="300"/>
+              </a:spcAft>
+              <a:buNone/>
+            </a:pPr>
+            <a:r>
+              <a:rPr lang="en-US" sz="1300" i="1" dirty="0">
+                <a:solidFill>
+                  <a:srgbClr val="2C2C2C"/>
+                </a:solidFill>
+                <a:latin typeface="Georgia" pitchFamily="34" charset="0"/>
+                <a:ea typeface="Georgia" pitchFamily="34" charset="-122"/>
+                <a:cs typeface="Georgia" pitchFamily="34" charset="-120"/>
+              </a:rPr>
+              <a:t>amāvasyā</a:t>
+            </a:r>
+            <a:pPr algn="l" indent="0" marL="0">
+              <a:lnSpc>
+                <a:spcPts val="1820"/>
+              </a:lnSpc>
+              <a:spcBef>
+                <a:spcPts val="300"/>
+              </a:spcBef>
+              <a:spcAft>
+                <a:spcPts val="300"/>
+              </a:spcAft>
+              <a:buNone/>
+            </a:pPr>
+            <a:r>
+              <a:rPr lang="en-US" sz="1300" dirty="0">
+                <a:solidFill>
+                  <a:srgbClr val="2C2C2C"/>
+                </a:solidFill>
+                <a:latin typeface="Georgia" pitchFamily="34" charset="0"/>
+                <a:ea typeface="Georgia" pitchFamily="34" charset="-122"/>
+                <a:cs typeface="Georgia" pitchFamily="34" charset="-120"/>
+              </a:rPr>
+              <a:t>.</a:t>
+            </a:r>
+            <a:endParaRPr lang="en-US" sz="1300" dirty="0"/>
+          </a:p>
+        </p:txBody>
+      </p:sp>
+      <p:sp>
+        <p:nvSpPr>
+          <p:cNvPr id="10" name="Text 8"/>
+          <p:cNvSpPr/>
+          <p:nvPr/>
+        </p:nvSpPr>
+        <p:spPr>
+          <a:xfrm>
+            <a:off x="692051" y="2612380"/>
+            <a:ext cx="7973389" cy="461963"/>
+          </a:xfrm>
+          <a:prstGeom prst="rect">
+            <a:avLst/>
+          </a:prstGeom>
+          <a:noFill/>
+          <a:ln/>
+        </p:spPr>
+        <p:txBody>
+          <a:bodyPr wrap="square" lIns="0" tIns="0" rIns="0" bIns="0" rtlCol="0" anchor="t"/>
+          <a:lstStyle/>
+          <a:p>
+            <a:pPr algn="l" indent="0" marL="0">
+              <a:lnSpc>
+                <a:spcPts val="1820"/>
+              </a:lnSpc>
+              <a:spcBef>
+                <a:spcPts val="300"/>
+              </a:spcBef>
+              <a:spcAft>
+                <a:spcPts val="300"/>
+              </a:spcAft>
+              <a:buNone/>
+            </a:pPr>
+            <a:r>
+              <a:rPr lang="en-US" sz="1300" dirty="0">
+                <a:solidFill>
+                  <a:srgbClr val="2C2C2C"/>
+                </a:solidFill>
+                <a:latin typeface="Georgia" pitchFamily="34" charset="0"/>
+                <a:ea typeface="Georgia" pitchFamily="34" charset="-122"/>
+                <a:cs typeface="Georgia" pitchFamily="34" charset="-120"/>
+              </a:rPr>
+              <a:t>So between </a:t>
+            </a:r>
+            <a:pPr algn="l" indent="0" marL="0">
+              <a:lnSpc>
+                <a:spcPts val="1820"/>
+              </a:lnSpc>
+              <a:spcBef>
+                <a:spcPts val="300"/>
+              </a:spcBef>
+              <a:spcAft>
+                <a:spcPts val="300"/>
+              </a:spcAft>
+              <a:buNone/>
+            </a:pPr>
+            <a:r>
+              <a:rPr lang="en-US" sz="1300" i="1" dirty="0">
+                <a:solidFill>
+                  <a:srgbClr val="2C2C2C"/>
+                </a:solidFill>
+                <a:latin typeface="Georgia" pitchFamily="34" charset="0"/>
+                <a:ea typeface="Georgia" pitchFamily="34" charset="-122"/>
+                <a:cs typeface="Georgia" pitchFamily="34" charset="-120"/>
+              </a:rPr>
+              <a:t>amāvasyā</a:t>
+            </a:r>
+            <a:pPr algn="l" indent="0" marL="0">
+              <a:lnSpc>
+                <a:spcPts val="1820"/>
+              </a:lnSpc>
+              <a:spcBef>
+                <a:spcPts val="300"/>
+              </a:spcBef>
+              <a:spcAft>
+                <a:spcPts val="300"/>
+              </a:spcAft>
+              <a:buNone/>
+            </a:pPr>
+            <a:r>
+              <a:rPr lang="en-US" sz="1300" dirty="0">
+                <a:solidFill>
+                  <a:srgbClr val="2C2C2C"/>
+                </a:solidFill>
+                <a:latin typeface="Georgia" pitchFamily="34" charset="0"/>
+                <a:ea typeface="Georgia" pitchFamily="34" charset="-122"/>
+                <a:cs typeface="Georgia" pitchFamily="34" charset="-120"/>
+              </a:rPr>
+              <a:t> and </a:t>
+            </a:r>
+            <a:pPr algn="l" indent="0" marL="0">
+              <a:lnSpc>
+                <a:spcPts val="1820"/>
+              </a:lnSpc>
+              <a:spcBef>
+                <a:spcPts val="300"/>
+              </a:spcBef>
+              <a:spcAft>
+                <a:spcPts val="300"/>
+              </a:spcAft>
+              <a:buNone/>
+            </a:pPr>
+            <a:r>
+              <a:rPr lang="en-US" sz="1300" i="1" dirty="0">
+                <a:solidFill>
+                  <a:srgbClr val="2C2C2C"/>
+                </a:solidFill>
+                <a:latin typeface="Georgia" pitchFamily="34" charset="0"/>
+                <a:ea typeface="Georgia" pitchFamily="34" charset="-122"/>
+                <a:cs typeface="Georgia" pitchFamily="34" charset="-120"/>
+              </a:rPr>
+              <a:t>pūrṇimā</a:t>
+            </a:r>
+            <a:pPr algn="l" indent="0" marL="0">
+              <a:lnSpc>
+                <a:spcPts val="1820"/>
+              </a:lnSpc>
+              <a:spcBef>
+                <a:spcPts val="300"/>
+              </a:spcBef>
+              <a:spcAft>
+                <a:spcPts val="300"/>
+              </a:spcAft>
+              <a:buNone/>
+            </a:pPr>
+            <a:r>
+              <a:rPr lang="en-US" sz="1300" dirty="0">
+                <a:solidFill>
+                  <a:srgbClr val="2C2C2C"/>
+                </a:solidFill>
+                <a:latin typeface="Georgia" pitchFamily="34" charset="0"/>
+                <a:ea typeface="Georgia" pitchFamily="34" charset="-122"/>
+                <a:cs typeface="Georgia" pitchFamily="34" charset="-120"/>
+              </a:rPr>
+              <a:t> — the FIRST half of the journey — the Moon gets bigger and bigger every night. That's the </a:t>
+            </a:r>
+            <a:pPr algn="l" indent="0" marL="0">
+              <a:lnSpc>
+                <a:spcPts val="1820"/>
+              </a:lnSpc>
+              <a:spcBef>
+                <a:spcPts val="300"/>
+              </a:spcBef>
+              <a:spcAft>
+                <a:spcPts val="300"/>
+              </a:spcAft>
+              <a:buNone/>
+            </a:pPr>
+            <a:r>
+              <a:rPr lang="en-US" sz="1300" b="1" i="1" dirty="0">
+                <a:solidFill>
+                  <a:srgbClr val="2C2C2C"/>
+                </a:solidFill>
+                <a:latin typeface="Georgia" pitchFamily="34" charset="0"/>
+                <a:ea typeface="Georgia" pitchFamily="34" charset="-122"/>
+                <a:cs typeface="Georgia" pitchFamily="34" charset="-120"/>
+              </a:rPr>
+              <a:t>growing half</a:t>
+            </a:r>
+            <a:pPr algn="l" indent="0" marL="0">
+              <a:lnSpc>
+                <a:spcPts val="1820"/>
+              </a:lnSpc>
+              <a:spcBef>
+                <a:spcPts val="300"/>
+              </a:spcBef>
+              <a:spcAft>
+                <a:spcPts val="300"/>
+              </a:spcAft>
+              <a:buNone/>
+            </a:pPr>
+            <a:r>
+              <a:rPr lang="en-US" sz="1300" dirty="0">
+                <a:solidFill>
+                  <a:srgbClr val="2C2C2C"/>
+                </a:solidFill>
+                <a:latin typeface="Georgia" pitchFamily="34" charset="0"/>
+                <a:ea typeface="Georgia" pitchFamily="34" charset="-122"/>
+                <a:cs typeface="Georgia" pitchFamily="34" charset="-120"/>
+              </a:rPr>
+              <a:t>.</a:t>
+            </a:r>
+            <a:endParaRPr lang="en-US" sz="1300" dirty="0"/>
+          </a:p>
+        </p:txBody>
+      </p:sp>
+      <p:sp>
+        <p:nvSpPr>
+          <p:cNvPr id="11" name="Text 9"/>
+          <p:cNvSpPr/>
+          <p:nvPr/>
+        </p:nvSpPr>
+        <p:spPr>
+          <a:xfrm>
+            <a:off x="692051" y="3112443"/>
+            <a:ext cx="7973389" cy="461963"/>
+          </a:xfrm>
+          <a:prstGeom prst="rect">
+            <a:avLst/>
+          </a:prstGeom>
+          <a:noFill/>
+          <a:ln/>
+        </p:spPr>
+        <p:txBody>
+          <a:bodyPr wrap="square" lIns="0" tIns="0" rIns="0" bIns="0" rtlCol="0" anchor="t"/>
+          <a:lstStyle/>
+          <a:p>
+            <a:pPr algn="l" indent="0" marL="0">
+              <a:lnSpc>
+                <a:spcPts val="1820"/>
+              </a:lnSpc>
+              <a:spcBef>
+                <a:spcPts val="300"/>
+              </a:spcBef>
+              <a:spcAft>
+                <a:spcPts val="300"/>
+              </a:spcAft>
+              <a:buNone/>
+            </a:pPr>
+            <a:r>
+              <a:rPr lang="en-US" sz="1300" dirty="0">
+                <a:solidFill>
+                  <a:srgbClr val="2C2C2C"/>
+                </a:solidFill>
+                <a:latin typeface="Georgia" pitchFamily="34" charset="0"/>
+                <a:ea typeface="Georgia" pitchFamily="34" charset="-122"/>
+                <a:cs typeface="Georgia" pitchFamily="34" charset="-120"/>
+              </a:rPr>
+              <a:t>Between </a:t>
+            </a:r>
+            <a:pPr algn="l" indent="0" marL="0">
+              <a:lnSpc>
+                <a:spcPts val="1820"/>
+              </a:lnSpc>
+              <a:spcBef>
+                <a:spcPts val="300"/>
+              </a:spcBef>
+              <a:spcAft>
+                <a:spcPts val="300"/>
+              </a:spcAft>
+              <a:buNone/>
+            </a:pPr>
+            <a:r>
+              <a:rPr lang="en-US" sz="1300" i="1" dirty="0">
+                <a:solidFill>
+                  <a:srgbClr val="2C2C2C"/>
+                </a:solidFill>
+                <a:latin typeface="Georgia" pitchFamily="34" charset="0"/>
+                <a:ea typeface="Georgia" pitchFamily="34" charset="-122"/>
+                <a:cs typeface="Georgia" pitchFamily="34" charset="-120"/>
+              </a:rPr>
+              <a:t>pūrṇimā</a:t>
+            </a:r>
+            <a:pPr algn="l" indent="0" marL="0">
+              <a:lnSpc>
+                <a:spcPts val="1820"/>
+              </a:lnSpc>
+              <a:spcBef>
+                <a:spcPts val="300"/>
+              </a:spcBef>
+              <a:spcAft>
+                <a:spcPts val="300"/>
+              </a:spcAft>
+              <a:buNone/>
+            </a:pPr>
+            <a:r>
+              <a:rPr lang="en-US" sz="1300" dirty="0">
+                <a:solidFill>
+                  <a:srgbClr val="2C2C2C"/>
+                </a:solidFill>
+                <a:latin typeface="Georgia" pitchFamily="34" charset="0"/>
+                <a:ea typeface="Georgia" pitchFamily="34" charset="-122"/>
+                <a:cs typeface="Georgia" pitchFamily="34" charset="-120"/>
+              </a:rPr>
+              <a:t> and </a:t>
+            </a:r>
+            <a:pPr algn="l" indent="0" marL="0">
+              <a:lnSpc>
+                <a:spcPts val="1820"/>
+              </a:lnSpc>
+              <a:spcBef>
+                <a:spcPts val="300"/>
+              </a:spcBef>
+              <a:spcAft>
+                <a:spcPts val="300"/>
+              </a:spcAft>
+              <a:buNone/>
+            </a:pPr>
+            <a:r>
+              <a:rPr lang="en-US" sz="1300" i="1" dirty="0">
+                <a:solidFill>
+                  <a:srgbClr val="2C2C2C"/>
+                </a:solidFill>
+                <a:latin typeface="Georgia" pitchFamily="34" charset="0"/>
+                <a:ea typeface="Georgia" pitchFamily="34" charset="-122"/>
+                <a:cs typeface="Georgia" pitchFamily="34" charset="-120"/>
+              </a:rPr>
+              <a:t>amāvasyā</a:t>
+            </a:r>
+            <a:pPr algn="l" indent="0" marL="0">
+              <a:lnSpc>
+                <a:spcPts val="1820"/>
+              </a:lnSpc>
+              <a:spcBef>
+                <a:spcPts val="300"/>
+              </a:spcBef>
+              <a:spcAft>
+                <a:spcPts val="300"/>
+              </a:spcAft>
+              <a:buNone/>
+            </a:pPr>
+            <a:r>
+              <a:rPr lang="en-US" sz="1300" dirty="0">
+                <a:solidFill>
+                  <a:srgbClr val="2C2C2C"/>
+                </a:solidFill>
+                <a:latin typeface="Georgia" pitchFamily="34" charset="0"/>
+                <a:ea typeface="Georgia" pitchFamily="34" charset="-122"/>
+                <a:cs typeface="Georgia" pitchFamily="34" charset="-120"/>
+              </a:rPr>
+              <a:t> — the SECOND half of the journey — the Moon gets smaller and smaller. That's the </a:t>
+            </a:r>
+            <a:pPr algn="l" indent="0" marL="0">
+              <a:lnSpc>
+                <a:spcPts val="1820"/>
+              </a:lnSpc>
+              <a:spcBef>
+                <a:spcPts val="300"/>
+              </a:spcBef>
+              <a:spcAft>
+                <a:spcPts val="300"/>
+              </a:spcAft>
+              <a:buNone/>
+            </a:pPr>
+            <a:r>
+              <a:rPr lang="en-US" sz="1300" b="1" i="1" dirty="0">
+                <a:solidFill>
+                  <a:srgbClr val="2C2C2C"/>
+                </a:solidFill>
+                <a:latin typeface="Georgia" pitchFamily="34" charset="0"/>
+                <a:ea typeface="Georgia" pitchFamily="34" charset="-122"/>
+                <a:cs typeface="Georgia" pitchFamily="34" charset="-120"/>
+              </a:rPr>
+              <a:t>shrinking half</a:t>
+            </a:r>
+            <a:pPr algn="l" indent="0" marL="0">
+              <a:lnSpc>
+                <a:spcPts val="1820"/>
+              </a:lnSpc>
+              <a:spcBef>
+                <a:spcPts val="300"/>
+              </a:spcBef>
+              <a:spcAft>
+                <a:spcPts val="300"/>
+              </a:spcAft>
+              <a:buNone/>
+            </a:pPr>
+            <a:r>
+              <a:rPr lang="en-US" sz="1300" dirty="0">
+                <a:solidFill>
+                  <a:srgbClr val="2C2C2C"/>
+                </a:solidFill>
+                <a:latin typeface="Georgia" pitchFamily="34" charset="0"/>
+                <a:ea typeface="Georgia" pitchFamily="34" charset="-122"/>
+                <a:cs typeface="Georgia" pitchFamily="34" charset="-120"/>
+              </a:rPr>
+              <a:t>.</a:t>
+            </a:r>
+            <a:endParaRPr lang="en-US" sz="1300" dirty="0"/>
+          </a:p>
+        </p:txBody>
+      </p:sp>
+      <p:sp>
+        <p:nvSpPr>
+          <p:cNvPr id="12" name="Text 10"/>
           <p:cNvSpPr/>
           <p:nvPr/>
         </p:nvSpPr>
@@ -5157,7 +5587,7 @@
                 <a:ea typeface="Georgia" pitchFamily="34" charset="-122"/>
                 <a:cs typeface="Georgia" pitchFamily="34" charset="-120"/>
               </a:rPr>
-              <a:t>Drawing (7 min)</a:t>
+              <a:t>Demo + walk (10 min)</a:t>
             </a:r>
             <a:endParaRPr lang="en-US" sz="1800" dirty="0"/>
           </a:p>
@@ -5172,6 +5602,146 @@
         <p:spPr>
           <a:xfrm>
             <a:off x="406301" y="870942"/>
+            <a:ext cx="8498026" cy="426541"/>
+          </a:xfrm>
+          <a:prstGeom prst="rect">
+            <a:avLst/>
+          </a:prstGeom>
+          <a:noFill/>
+          <a:ln/>
+        </p:spPr>
+        <p:txBody>
+          <a:bodyPr wrap="square" lIns="0" tIns="0" rIns="0" bIns="0" rtlCol="0" anchor="t"/>
+          <a:lstStyle/>
+          <a:p>
+            <a:pPr algn="l" indent="0" marL="0">
+              <a:lnSpc>
+                <a:spcPts val="1680"/>
+              </a:lnSpc>
+              <a:spcBef>
+                <a:spcPts val="300"/>
+              </a:spcBef>
+              <a:spcAft>
+                <a:spcPts val="300"/>
+              </a:spcAft>
+              <a:buNone/>
+            </a:pPr>
+            <a:r>
+              <a:rPr lang="en-US" sz="1200" dirty="0">
+                <a:solidFill>
+                  <a:srgbClr val="2C2C2C"/>
+                </a:solidFill>
+                <a:latin typeface="Verdana" pitchFamily="34" charset="0"/>
+                <a:ea typeface="Verdana" pitchFamily="34" charset="-122"/>
+                <a:cs typeface="Verdana" pitchFamily="34" charset="-120"/>
+              </a:rPr>
+              <a:t>Draw a long line on the floor (or on the board). At the left end write </a:t>
+            </a:r>
+            <a:pPr algn="l" indent="0" marL="0">
+              <a:lnSpc>
+                <a:spcPts val="1680"/>
+              </a:lnSpc>
+              <a:spcBef>
+                <a:spcPts val="300"/>
+              </a:spcBef>
+              <a:spcAft>
+                <a:spcPts val="300"/>
+              </a:spcAft>
+              <a:buNone/>
+            </a:pPr>
+            <a:r>
+              <a:rPr lang="en-US" sz="1200" i="1" dirty="0">
+                <a:solidFill>
+                  <a:srgbClr val="2C2C2C"/>
+                </a:solidFill>
+                <a:latin typeface="Verdana" pitchFamily="34" charset="0"/>
+                <a:ea typeface="Verdana" pitchFamily="34" charset="-122"/>
+                <a:cs typeface="Verdana" pitchFamily="34" charset="-120"/>
+              </a:rPr>
+              <a:t>amāvasyā</a:t>
+            </a:r>
+            <a:pPr algn="l" indent="0" marL="0">
+              <a:lnSpc>
+                <a:spcPts val="1680"/>
+              </a:lnSpc>
+              <a:spcBef>
+                <a:spcPts val="300"/>
+              </a:spcBef>
+              <a:spcAft>
+                <a:spcPts val="300"/>
+              </a:spcAft>
+              <a:buNone/>
+            </a:pPr>
+            <a:r>
+              <a:rPr lang="en-US" sz="1200" dirty="0">
+                <a:solidFill>
+                  <a:srgbClr val="2C2C2C"/>
+                </a:solidFill>
+                <a:latin typeface="Verdana" pitchFamily="34" charset="0"/>
+                <a:ea typeface="Verdana" pitchFamily="34" charset="-122"/>
+                <a:cs typeface="Verdana" pitchFamily="34" charset="-120"/>
+              </a:rPr>
+              <a:t> and draw a dark circle. At the right end write </a:t>
+            </a:r>
+            <a:pPr algn="l" indent="0" marL="0">
+              <a:lnSpc>
+                <a:spcPts val="1680"/>
+              </a:lnSpc>
+              <a:spcBef>
+                <a:spcPts val="300"/>
+              </a:spcBef>
+              <a:spcAft>
+                <a:spcPts val="300"/>
+              </a:spcAft>
+              <a:buNone/>
+            </a:pPr>
+            <a:r>
+              <a:rPr lang="en-US" sz="1200" i="1" dirty="0">
+                <a:solidFill>
+                  <a:srgbClr val="2C2C2C"/>
+                </a:solidFill>
+                <a:latin typeface="Verdana" pitchFamily="34" charset="0"/>
+                <a:ea typeface="Verdana" pitchFamily="34" charset="-122"/>
+                <a:cs typeface="Verdana" pitchFamily="34" charset="-120"/>
+              </a:rPr>
+              <a:t>pūrṇimā</a:t>
+            </a:r>
+            <a:pPr algn="l" indent="0" marL="0">
+              <a:lnSpc>
+                <a:spcPts val="1680"/>
+              </a:lnSpc>
+              <a:spcBef>
+                <a:spcPts val="300"/>
+              </a:spcBef>
+              <a:spcAft>
+                <a:spcPts val="300"/>
+              </a:spcAft>
+              <a:buNone/>
+            </a:pPr>
+            <a:r>
+              <a:rPr lang="en-US" sz="1200" dirty="0">
+                <a:solidFill>
+                  <a:srgbClr val="2C2C2C"/>
+                </a:solidFill>
+                <a:latin typeface="Verdana" pitchFamily="34" charset="0"/>
+                <a:ea typeface="Verdana" pitchFamily="34" charset="-122"/>
+                <a:cs typeface="Verdana" pitchFamily="34" charset="-120"/>
+              </a:rPr>
+              <a:t> and draw a bright full circle.</a:t>
+            </a:r>
+            <a:endParaRPr lang="en-US" sz="1200" dirty="0"/>
+          </a:p>
+        </p:txBody>
+      </p:sp>
+      <p:sp>
+        <p:nvSpPr>
+          <p:cNvPr id="5" name="Text 3"/>
+          <p:cNvSpPr/>
+          <p:nvPr/>
+        </p:nvSpPr>
+        <p:spPr>
+          <a:xfrm>
+            <a:off x="406301" y="1373684"/>
             <a:ext cx="8498026" cy="213271"/>
           </a:xfrm>
           <a:prstGeom prst="rect">
@@ -5205,7 +5775,7 @@
                 <a:ea typeface="Verdana" pitchFamily="34" charset="-122"/>
                 <a:cs typeface="Verdana" pitchFamily="34" charset="-120"/>
               </a:rPr>
-              <a:t>Each child draws TWO Moons on paper:</a:t>
+              <a:t>In the middle, draw 5 stages between them — a thin sliver, a half-moon, a 3/4 moon, etc.</a:t>
             </a:r>
             <a:endParaRPr lang="en-US" sz="1200" dirty="0"/>
           </a:p>
@@ -5213,14 +5783,14 @@
       </p:sp>
       <p:sp>
         <p:nvSpPr>
-          <p:cNvPr id="5" name="Text 3"/>
+          <p:cNvPr id="6" name="Text 4"/>
           <p:cNvSpPr/>
           <p:nvPr/>
         </p:nvSpPr>
         <p:spPr>
           <a:xfrm>
-            <a:off x="634901" y="1173063"/>
-            <a:ext cx="8102798" cy="731341"/>
+            <a:off x="406301" y="1663154"/>
+            <a:ext cx="8498026" cy="213271"/>
           </a:xfrm>
           <a:prstGeom prst="rect">
             <a:avLst/>
@@ -5232,15 +5802,17 @@
           <a:bodyPr wrap="square" lIns="0" tIns="0" rIns="0" bIns="0" rtlCol="0" anchor="t"/>
           <a:lstStyle/>
           <a:p>
-            <a:pPr algn="l" marL="342900" indent="-342900">
-              <a:lnSpc>
-                <a:spcPts val="1620"/>
-              </a:lnSpc>
-              <a:spcAft>
-                <a:spcPts val="300"/>
-              </a:spcAft>
-              <a:buSzPct val="100000"/>
-              <a:buChar char="•"/>
+            <a:pPr algn="l" indent="0" marL="0">
+              <a:lnSpc>
+                <a:spcPts val="1680"/>
+              </a:lnSpc>
+              <a:spcBef>
+                <a:spcPts val="300"/>
+              </a:spcBef>
+              <a:spcAft>
+                <a:spcPts val="300"/>
+              </a:spcAft>
+              <a:buNone/>
             </a:pPr>
             <a:r>
               <a:rPr lang="en-US" sz="1200" dirty="0">
@@ -5251,12 +5823,15 @@
                 <a:ea typeface="Verdana" pitchFamily="34" charset="-122"/>
                 <a:cs typeface="Verdana" pitchFamily="34" charset="-120"/>
               </a:rPr>
-              <a:t>A </a:t>
-            </a:r>
-            <a:pPr algn="l" indent="0" marL="0">
-              <a:lnSpc>
-                <a:spcPts val="1620"/>
-              </a:lnSpc>
+              <a:t>Now do the same for the second half — </a:t>
+            </a:r>
+            <a:pPr algn="l" indent="0" marL="0">
+              <a:lnSpc>
+                <a:spcPts val="1680"/>
+              </a:lnSpc>
+              <a:spcBef>
+                <a:spcPts val="300"/>
+              </a:spcBef>
               <a:spcAft>
                 <a:spcPts val="300"/>
               </a:spcAft>
@@ -5275,8 +5850,11 @@
             </a:r>
             <a:pPr algn="l" indent="0" marL="0">
               <a:lnSpc>
-                <a:spcPts val="1620"/>
-              </a:lnSpc>
+                <a:spcPts val="1680"/>
+              </a:lnSpc>
+              <a:spcBef>
+                <a:spcPts val="300"/>
+              </a:spcBef>
               <a:spcAft>
                 <a:spcPts val="300"/>
               </a:spcAft>
@@ -5291,79 +5869,61 @@
                 <a:ea typeface="Verdana" pitchFamily="34" charset="-122"/>
                 <a:cs typeface="Verdana" pitchFamily="34" charset="-120"/>
               </a:rPr>
-              <a:t> — a full bright circle. Label it "pūrṇimā."</a:t>
+              <a:t> shrinks back through 3/4, half, sliver, to </a:t>
+            </a:r>
+            <a:pPr algn="l" indent="0" marL="0">
+              <a:lnSpc>
+                <a:spcPts val="1680"/>
+              </a:lnSpc>
+              <a:spcBef>
+                <a:spcPts val="300"/>
+              </a:spcBef>
+              <a:spcAft>
+                <a:spcPts val="300"/>
+              </a:spcAft>
+              <a:buNone/>
+            </a:pPr>
+            <a:r>
+              <a:rPr lang="en-US" sz="1200" i="1" dirty="0">
+                <a:solidFill>
+                  <a:srgbClr val="2C2C2C"/>
+                </a:solidFill>
+                <a:latin typeface="Verdana" pitchFamily="34" charset="0"/>
+                <a:ea typeface="Verdana" pitchFamily="34" charset="-122"/>
+                <a:cs typeface="Verdana" pitchFamily="34" charset="-120"/>
+              </a:rPr>
+              <a:t>amāvasyā</a:t>
+            </a:r>
+            <a:pPr algn="l" indent="0" marL="0">
+              <a:lnSpc>
+                <a:spcPts val="1680"/>
+              </a:lnSpc>
+              <a:spcBef>
+                <a:spcPts val="300"/>
+              </a:spcBef>
+              <a:spcAft>
+                <a:spcPts val="300"/>
+              </a:spcAft>
+              <a:buNone/>
+            </a:pPr>
+            <a:r>
+              <a:rPr lang="en-US" sz="1200" dirty="0">
+                <a:solidFill>
+                  <a:srgbClr val="2C2C2C"/>
+                </a:solidFill>
+                <a:latin typeface="Verdana" pitchFamily="34" charset="0"/>
+                <a:ea typeface="Verdana" pitchFamily="34" charset="-122"/>
+                <a:cs typeface="Verdana" pitchFamily="34" charset="-120"/>
+              </a:rPr>
+              <a:t>.</a:t>
             </a:r>
             <a:endParaRPr lang="en-US" sz="1200" dirty="0"/>
           </a:p>
-          <a:p>
-            <a:pPr algn="l" marL="342900" indent="-342900">
-              <a:lnSpc>
-                <a:spcPts val="1620"/>
-              </a:lnSpc>
-              <a:spcAft>
-                <a:spcPts val="300"/>
-              </a:spcAft>
-              <a:buSzPct val="100000"/>
-              <a:buChar char="•"/>
-            </a:pPr>
-            <a:r>
-              <a:rPr lang="en-US" sz="1200" dirty="0">
-                <a:solidFill>
-                  <a:srgbClr val="2C2C2C"/>
-                </a:solidFill>
-                <a:latin typeface="Verdana" pitchFamily="34" charset="0"/>
-                <a:ea typeface="Verdana" pitchFamily="34" charset="-122"/>
-                <a:cs typeface="Verdana" pitchFamily="34" charset="-120"/>
-              </a:rPr>
-              <a:t>An </a:t>
-            </a:r>
-            <a:pPr algn="l" indent="0" marL="0">
-              <a:lnSpc>
-                <a:spcPts val="1620"/>
-              </a:lnSpc>
-              <a:spcAft>
-                <a:spcPts val="300"/>
-              </a:spcAft>
-              <a:buNone/>
-            </a:pPr>
-            <a:r>
-              <a:rPr lang="en-US" sz="1200" i="1" dirty="0">
-                <a:solidFill>
-                  <a:srgbClr val="2C2C2C"/>
-                </a:solidFill>
-                <a:latin typeface="Verdana" pitchFamily="34" charset="0"/>
-                <a:ea typeface="Verdana" pitchFamily="34" charset="-122"/>
-                <a:cs typeface="Verdana" pitchFamily="34" charset="-120"/>
-              </a:rPr>
-              <a:t>amāvasyā</a:t>
-            </a:r>
-            <a:pPr algn="l" indent="0" marL="0">
-              <a:lnSpc>
-                <a:spcPts val="1620"/>
-              </a:lnSpc>
-              <a:spcAft>
-                <a:spcPts val="300"/>
-              </a:spcAft>
-              <a:buNone/>
-            </a:pPr>
-            <a:r>
-              <a:rPr lang="en-US" sz="1200" dirty="0">
-                <a:solidFill>
-                  <a:srgbClr val="2C2C2C"/>
-                </a:solidFill>
-                <a:latin typeface="Verdana" pitchFamily="34" charset="0"/>
-                <a:ea typeface="Verdana" pitchFamily="34" charset="-122"/>
-                <a:cs typeface="Verdana" pitchFamily="34" charset="-120"/>
-              </a:rPr>
-              <a:t> — an empty circle (just the outline, dark inside, or a black filled circle with a tiny sliver). Label it "amāvasyā."</a:t>
-            </a:r>
-            <a:endParaRPr lang="en-US" sz="1200" dirty="0"/>
-          </a:p>
-        </p:txBody>
-      </p:sp>
-      <p:sp>
-        <p:nvSpPr>
-          <p:cNvPr id="6" name="Text 4"/>
+        </p:txBody>
+      </p:sp>
+      <p:sp>
+        <p:nvSpPr>
+          <p:cNvPr id="7" name="Text 5"/>
           <p:cNvSpPr/>
           <p:nvPr/>
         </p:nvSpPr>
@@ -5513,7 +6073,7 @@
                 <a:ea typeface="Georgia" pitchFamily="34" charset="-122"/>
                 <a:cs typeface="Georgia" pitchFamily="34" charset="-120"/>
               </a:rPr>
-              <a:t>Wrap-up (3 min)</a:t>
+              <a:t>Demo + walk (10 min) (cont.)</a:t>
             </a:r>
             <a:endParaRPr lang="en-US" sz="1800" dirty="0"/>
           </a:p>
@@ -5528,7 +6088,7 @@
         <p:spPr>
           <a:xfrm>
             <a:off x="406301" y="870942"/>
-            <a:ext cx="8498026" cy="213271"/>
+            <a:ext cx="8498026" cy="426541"/>
           </a:xfrm>
           <a:prstGeom prst="rect">
             <a:avLst/>
@@ -5561,30 +6121,7 @@
                 <a:ea typeface="Verdana" pitchFamily="34" charset="-122"/>
                 <a:cs typeface="Verdana" pitchFamily="34" charset="-120"/>
               </a:rPr>
-              <a:t>– Hold up 2–3 drawings. – Chant once more: </a:t>
-            </a:r>
-            <a:pPr algn="l" indent="0" marL="0">
-              <a:lnSpc>
-                <a:spcPts val="1680"/>
-              </a:lnSpc>
-              <a:spcBef>
-                <a:spcPts val="300"/>
-              </a:spcBef>
-              <a:spcAft>
-                <a:spcPts val="300"/>
-              </a:spcAft>
-              <a:buNone/>
-            </a:pPr>
-            <a:r>
-              <a:rPr lang="en-US" sz="1200" i="1" dirty="0">
-                <a:solidFill>
-                  <a:srgbClr val="2C2C2C"/>
-                </a:solidFill>
-                <a:latin typeface="Verdana" pitchFamily="34" charset="0"/>
-                <a:ea typeface="Verdana" pitchFamily="34" charset="-122"/>
-                <a:cs typeface="Verdana" pitchFamily="34" charset="-120"/>
-              </a:rPr>
-              <a:t>"am - mah - vahs - yah! poor - ni - mah!"</a:t>
+              <a:t>Have 5 children walk along the line, holding a paper Moon shape at each station. The rest of the class chants "GROWING" while they walk left-to-right and "SHRINKING" while they walk right-to-left.</a:t>
             </a:r>
             <a:endParaRPr lang="en-US" sz="1200" dirty="0"/>
           </a:p>
@@ -5593,92 +6130,6 @@
       <p:sp>
         <p:nvSpPr>
           <p:cNvPr id="5" name="Text 3"/>
-          <p:cNvSpPr/>
-          <p:nvPr/>
-        </p:nvSpPr>
-        <p:spPr>
-          <a:xfrm>
-            <a:off x="634901" y="1173063"/>
-            <a:ext cx="8102798" cy="487561"/>
-          </a:xfrm>
-          <a:prstGeom prst="rect">
-            <a:avLst/>
-          </a:prstGeom>
-          <a:noFill/>
-          <a:ln/>
-        </p:spPr>
-        <p:txBody>
-          <a:bodyPr wrap="square" lIns="0" tIns="0" rIns="0" bIns="0" rtlCol="0" anchor="t"/>
-          <a:lstStyle/>
-          <a:p>
-            <a:pPr algn="l" marL="342900" indent="-342900">
-              <a:lnSpc>
-                <a:spcPts val="1620"/>
-              </a:lnSpc>
-              <a:spcAft>
-                <a:spcPts val="300"/>
-              </a:spcAft>
-              <a:buSzPct val="100000"/>
-              <a:buChar char="•"/>
-            </a:pPr>
-            <a:r>
-              <a:rPr lang="en-US" sz="1200" b="1" dirty="0">
-                <a:solidFill>
-                  <a:srgbClr val="2C2C2C"/>
-                </a:solidFill>
-                <a:latin typeface="Verdana" pitchFamily="34" charset="0"/>
-                <a:ea typeface="Verdana" pitchFamily="34" charset="-122"/>
-                <a:cs typeface="Verdana" pitchFamily="34" charset="-120"/>
-              </a:rPr>
-              <a:t>Homework:</a:t>
-            </a:r>
-            <a:pPr algn="l" indent="0" marL="0">
-              <a:lnSpc>
-                <a:spcPts val="1620"/>
-              </a:lnSpc>
-              <a:spcAft>
-                <a:spcPts val="300"/>
-              </a:spcAft>
-              <a:buNone/>
-            </a:pPr>
-            <a:r>
-              <a:rPr lang="en-US" sz="1200" dirty="0">
-                <a:solidFill>
-                  <a:srgbClr val="2C2C2C"/>
-                </a:solidFill>
-                <a:latin typeface="Verdana" pitchFamily="34" charset="0"/>
-                <a:ea typeface="Verdana" pitchFamily="34" charset="-122"/>
-                <a:cs typeface="Verdana" pitchFamily="34" charset="-120"/>
-              </a:rPr>
-              <a:t> </a:t>
-            </a:r>
-            <a:pPr algn="l" indent="0" marL="0">
-              <a:lnSpc>
-                <a:spcPts val="1620"/>
-              </a:lnSpc>
-              <a:spcAft>
-                <a:spcPts val="300"/>
-              </a:spcAft>
-              <a:buNone/>
-            </a:pPr>
-            <a:r>
-              <a:rPr lang="en-US" sz="1200" i="1" dirty="0">
-                <a:solidFill>
-                  <a:srgbClr val="2C2C2C"/>
-                </a:solidFill>
-                <a:latin typeface="Verdana" pitchFamily="34" charset="0"/>
-                <a:ea typeface="Verdana" pitchFamily="34" charset="-122"/>
-                <a:cs typeface="Verdana" pitchFamily="34" charset="-120"/>
-              </a:rPr>
-              <a:t>Look at the Moon tonight. Is the Moon growing or shrinking? (Ask a grown-up if you don't know.)</a:t>
-            </a:r>
-            <a:endParaRPr lang="en-US" sz="1200" dirty="0"/>
-          </a:p>
-        </p:txBody>
-      </p:sp>
-      <p:sp>
-        <p:nvSpPr>
-          <p:cNvPr id="6" name="Text 4"/>
           <p:cNvSpPr/>
           <p:nvPr/>
         </p:nvSpPr>
@@ -5828,7 +6279,7 @@
                 <a:ea typeface="Georgia" pitchFamily="34" charset="-122"/>
                 <a:cs typeface="Georgia" pitchFamily="34" charset="-120"/>
               </a:rPr>
-              <a:t>Homework</a:t>
+              <a:t>Drawing (7 min)</a:t>
             </a:r>
             <a:endParaRPr lang="en-US" sz="1800" dirty="0"/>
           </a:p>
@@ -5876,42 +6327,42 @@
                 <a:ea typeface="Verdana" pitchFamily="34" charset="-122"/>
                 <a:cs typeface="Verdana" pitchFamily="34" charset="-120"/>
               </a:rPr>
-              <a:t>– Continue the Moon Diary. Add </a:t>
-            </a:r>
-            <a:pPr algn="l" indent="0" marL="0">
-              <a:lnSpc>
-                <a:spcPts val="1680"/>
-              </a:lnSpc>
-              <a:spcBef>
-                <a:spcPts val="300"/>
-              </a:spcBef>
-              <a:spcAft>
-                <a:spcPts val="300"/>
-              </a:spcAft>
-              <a:buNone/>
-            </a:pPr>
-            <a:r>
-              <a:rPr lang="en-US" sz="1200" b="1" dirty="0">
-                <a:solidFill>
-                  <a:srgbClr val="2C2C2C"/>
-                </a:solidFill>
-                <a:latin typeface="Verdana" pitchFamily="34" charset="0"/>
-                <a:ea typeface="Verdana" pitchFamily="34" charset="-122"/>
-                <a:cs typeface="Verdana" pitchFamily="34" charset="-120"/>
-              </a:rPr>
-              <a:t>"growing"</a:t>
-            </a:r>
-            <a:pPr algn="l" indent="0" marL="0">
-              <a:lnSpc>
-                <a:spcPts val="1680"/>
-              </a:lnSpc>
-              <a:spcBef>
-                <a:spcPts val="300"/>
-              </a:spcBef>
-              <a:spcAft>
-                <a:spcPts val="300"/>
-              </a:spcAft>
-              <a:buNone/>
+              <a:t>Each child draws TWO Moons on paper:</a:t>
+            </a:r>
+            <a:endParaRPr lang="en-US" sz="1200" dirty="0"/>
+          </a:p>
+        </p:txBody>
+      </p:sp>
+      <p:sp>
+        <p:nvSpPr>
+          <p:cNvPr id="5" name="Text 3"/>
+          <p:cNvSpPr/>
+          <p:nvPr/>
+        </p:nvSpPr>
+        <p:spPr>
+          <a:xfrm>
+            <a:off x="634901" y="1173063"/>
+            <a:ext cx="8102798" cy="731341"/>
+          </a:xfrm>
+          <a:prstGeom prst="rect">
+            <a:avLst/>
+          </a:prstGeom>
+          <a:noFill/>
+          <a:ln/>
+        </p:spPr>
+        <p:txBody>
+          <a:bodyPr wrap="square" lIns="0" tIns="0" rIns="0" bIns="0" rtlCol="0" anchor="t"/>
+          <a:lstStyle/>
+          <a:p>
+            <a:pPr algn="l" marL="342900" indent="-342900">
+              <a:lnSpc>
+                <a:spcPts val="1620"/>
+              </a:lnSpc>
+              <a:spcAft>
+                <a:spcPts val="300"/>
+              </a:spcAft>
+              <a:buSzPct val="100000"/>
+              <a:buChar char="•"/>
             </a:pPr>
             <a:r>
               <a:rPr lang="en-US" sz="1200" dirty="0">
@@ -5922,38 +6373,32 @@
                 <a:ea typeface="Verdana" pitchFamily="34" charset="-122"/>
                 <a:cs typeface="Verdana" pitchFamily="34" charset="-120"/>
               </a:rPr>
-              <a:t> or </a:t>
-            </a:r>
-            <a:pPr algn="l" indent="0" marL="0">
-              <a:lnSpc>
-                <a:spcPts val="1680"/>
-              </a:lnSpc>
-              <a:spcBef>
-                <a:spcPts val="300"/>
-              </a:spcBef>
-              <a:spcAft>
-                <a:spcPts val="300"/>
-              </a:spcAft>
-              <a:buNone/>
-            </a:pPr>
-            <a:r>
-              <a:rPr lang="en-US" sz="1200" b="1" dirty="0">
-                <a:solidFill>
-                  <a:srgbClr val="2C2C2C"/>
-                </a:solidFill>
-                <a:latin typeface="Verdana" pitchFamily="34" charset="0"/>
-                <a:ea typeface="Verdana" pitchFamily="34" charset="-122"/>
-                <a:cs typeface="Verdana" pitchFamily="34" charset="-120"/>
-              </a:rPr>
-              <a:t>"shrinking"</a:t>
-            </a:r>
-            <a:pPr algn="l" indent="0" marL="0">
-              <a:lnSpc>
-                <a:spcPts val="1680"/>
-              </a:lnSpc>
-              <a:spcBef>
-                <a:spcPts val="300"/>
-              </a:spcBef>
+              <a:t>A </a:t>
+            </a:r>
+            <a:pPr algn="l" indent="0" marL="0">
+              <a:lnSpc>
+                <a:spcPts val="1620"/>
+              </a:lnSpc>
+              <a:spcAft>
+                <a:spcPts val="300"/>
+              </a:spcAft>
+              <a:buNone/>
+            </a:pPr>
+            <a:r>
+              <a:rPr lang="en-US" sz="1200" i="1" dirty="0">
+                <a:solidFill>
+                  <a:srgbClr val="2C2C2C"/>
+                </a:solidFill>
+                <a:latin typeface="Verdana" pitchFamily="34" charset="0"/>
+                <a:ea typeface="Verdana" pitchFamily="34" charset="-122"/>
+                <a:cs typeface="Verdana" pitchFamily="34" charset="-120"/>
+              </a:rPr>
+              <a:t>pūrṇimā</a:t>
+            </a:r>
+            <a:pPr algn="l" indent="0" marL="0">
+              <a:lnSpc>
+                <a:spcPts val="1620"/>
+              </a:lnSpc>
               <a:spcAft>
                 <a:spcPts val="300"/>
               </a:spcAft>
@@ -5968,15 +6413,79 @@
                 <a:ea typeface="Verdana" pitchFamily="34" charset="-122"/>
                 <a:cs typeface="Verdana" pitchFamily="34" charset="-120"/>
               </a:rPr>
-              <a:t> next to tonight's sketch.</a:t>
+              <a:t> — a full bright circle. Label it "pūrṇimā."</a:t>
             </a:r>
             <a:endParaRPr lang="en-US" sz="1200" dirty="0"/>
           </a:p>
-        </p:txBody>
-      </p:sp>
-      <p:sp>
-        <p:nvSpPr>
-          <p:cNvPr id="5" name="Text 3"/>
+          <a:p>
+            <a:pPr algn="l" marL="342900" indent="-342900">
+              <a:lnSpc>
+                <a:spcPts val="1620"/>
+              </a:lnSpc>
+              <a:spcAft>
+                <a:spcPts val="300"/>
+              </a:spcAft>
+              <a:buSzPct val="100000"/>
+              <a:buChar char="•"/>
+            </a:pPr>
+            <a:r>
+              <a:rPr lang="en-US" sz="1200" dirty="0">
+                <a:solidFill>
+                  <a:srgbClr val="2C2C2C"/>
+                </a:solidFill>
+                <a:latin typeface="Verdana" pitchFamily="34" charset="0"/>
+                <a:ea typeface="Verdana" pitchFamily="34" charset="-122"/>
+                <a:cs typeface="Verdana" pitchFamily="34" charset="-120"/>
+              </a:rPr>
+              <a:t>An </a:t>
+            </a:r>
+            <a:pPr algn="l" indent="0" marL="0">
+              <a:lnSpc>
+                <a:spcPts val="1620"/>
+              </a:lnSpc>
+              <a:spcAft>
+                <a:spcPts val="300"/>
+              </a:spcAft>
+              <a:buNone/>
+            </a:pPr>
+            <a:r>
+              <a:rPr lang="en-US" sz="1200" i="1" dirty="0">
+                <a:solidFill>
+                  <a:srgbClr val="2C2C2C"/>
+                </a:solidFill>
+                <a:latin typeface="Verdana" pitchFamily="34" charset="0"/>
+                <a:ea typeface="Verdana" pitchFamily="34" charset="-122"/>
+                <a:cs typeface="Verdana" pitchFamily="34" charset="-120"/>
+              </a:rPr>
+              <a:t>amāvasyā</a:t>
+            </a:r>
+            <a:pPr algn="l" indent="0" marL="0">
+              <a:lnSpc>
+                <a:spcPts val="1620"/>
+              </a:lnSpc>
+              <a:spcAft>
+                <a:spcPts val="300"/>
+              </a:spcAft>
+              <a:buNone/>
+            </a:pPr>
+            <a:r>
+              <a:rPr lang="en-US" sz="1200" dirty="0">
+                <a:solidFill>
+                  <a:srgbClr val="2C2C2C"/>
+                </a:solidFill>
+                <a:latin typeface="Verdana" pitchFamily="34" charset="0"/>
+                <a:ea typeface="Verdana" pitchFamily="34" charset="-122"/>
+                <a:cs typeface="Verdana" pitchFamily="34" charset="-120"/>
+              </a:rPr>
+              <a:t> — an empty circle (just the outline, dark inside, or a black filled circle with a tiny sliver). Label it "amāvasyā."</a:t>
+            </a:r>
+            <a:endParaRPr lang="en-US" sz="1200" dirty="0"/>
+          </a:p>
+        </p:txBody>
+      </p:sp>
+      <p:sp>
+        <p:nvSpPr>
+          <p:cNvPr id="6" name="Text 4"/>
           <p:cNvSpPr/>
           <p:nvPr/>
         </p:nvSpPr>
